--- a/BMA workshop intro lecture.pptx
+++ b/BMA workshop intro lecture.pptx
@@ -5,7 +5,7 @@
     <p:sldMasterId id="2147483648" r:id="rId1"/>
   </p:sldMasterIdLst>
   <p:notesMasterIdLst>
-    <p:notesMasterId r:id="rId24"/>
+    <p:notesMasterId r:id="rId29"/>
   </p:notesMasterIdLst>
   <p:sldIdLst>
     <p:sldId id="256" r:id="rId2"/>
@@ -28,8 +28,13 @@
     <p:sldId id="275" r:id="rId19"/>
     <p:sldId id="276" r:id="rId20"/>
     <p:sldId id="277" r:id="rId21"/>
-    <p:sldId id="278" r:id="rId22"/>
-    <p:sldId id="279" r:id="rId23"/>
+    <p:sldId id="280" r:id="rId22"/>
+    <p:sldId id="284" r:id="rId23"/>
+    <p:sldId id="278" r:id="rId24"/>
+    <p:sldId id="281" r:id="rId25"/>
+    <p:sldId id="283" r:id="rId26"/>
+    <p:sldId id="282" r:id="rId27"/>
+    <p:sldId id="279" r:id="rId28"/>
   </p:sldIdLst>
   <p:sldSz cx="12192000" cy="6858000"/>
   <p:notesSz cx="6858000" cy="9144000"/>
@@ -218,7 +223,7 @@
           <a:p>
             <a:fld id="{49984C46-5321-454E-A363-77D6A1FA2703}" type="datetimeFigureOut">
               <a:rPr lang="nl-NL" smtClean="0"/>
-              <a:t>11-6-2026</a:t>
+              <a:t>17-6-2026</a:t>
             </a:fld>
             <a:endParaRPr lang="nl-NL"/>
           </a:p>
@@ -377,7 +382,7 @@
           <a:p>
             <a:fld id="{BDFA7303-E99A-46AD-9328-5CDE00ABEAA6}" type="slidenum">
               <a:rPr lang="nl-NL" smtClean="0"/>
-              <a:t>‹#›</a:t>
+              <a:t>‹nr.›</a:t>
             </a:fld>
             <a:endParaRPr lang="nl-NL"/>
           </a:p>
@@ -723,7 +728,7 @@
           <a:p>
             <a:fld id="{9B348AC7-D1F4-4DBB-970A-CF4D2A4E5857}" type="datetimeFigureOut">
               <a:rPr lang="nl-NL" smtClean="0"/>
-              <a:t>11-6-2026</a:t>
+              <a:t>17-6-2026</a:t>
             </a:fld>
             <a:endParaRPr lang="nl-NL"/>
           </a:p>
@@ -777,7 +782,7 @@
           <a:p>
             <a:fld id="{250C08FC-E505-46BB-98EF-158A0C71FCC9}" type="slidenum">
               <a:rPr lang="nl-NL" smtClean="0"/>
-              <a:t>‹#›</a:t>
+              <a:t>‹nr.›</a:t>
             </a:fld>
             <a:endParaRPr lang="nl-NL"/>
           </a:p>
@@ -923,7 +928,7 @@
           <a:p>
             <a:fld id="{9B348AC7-D1F4-4DBB-970A-CF4D2A4E5857}" type="datetimeFigureOut">
               <a:rPr lang="nl-NL" smtClean="0"/>
-              <a:t>11-6-2026</a:t>
+              <a:t>17-6-2026</a:t>
             </a:fld>
             <a:endParaRPr lang="nl-NL"/>
           </a:p>
@@ -977,7 +982,7 @@
           <a:p>
             <a:fld id="{250C08FC-E505-46BB-98EF-158A0C71FCC9}" type="slidenum">
               <a:rPr lang="nl-NL" smtClean="0"/>
-              <a:t>‹#›</a:t>
+              <a:t>‹nr.›</a:t>
             </a:fld>
             <a:endParaRPr lang="nl-NL"/>
           </a:p>
@@ -1133,7 +1138,7 @@
           <a:p>
             <a:fld id="{9B348AC7-D1F4-4DBB-970A-CF4D2A4E5857}" type="datetimeFigureOut">
               <a:rPr lang="nl-NL" smtClean="0"/>
-              <a:t>11-6-2026</a:t>
+              <a:t>17-6-2026</a:t>
             </a:fld>
             <a:endParaRPr lang="nl-NL"/>
           </a:p>
@@ -1187,7 +1192,7 @@
           <a:p>
             <a:fld id="{250C08FC-E505-46BB-98EF-158A0C71FCC9}" type="slidenum">
               <a:rPr lang="nl-NL" smtClean="0"/>
-              <a:t>‹#›</a:t>
+              <a:t>‹nr.›</a:t>
             </a:fld>
             <a:endParaRPr lang="nl-NL"/>
           </a:p>
@@ -1333,7 +1338,7 @@
           <a:p>
             <a:fld id="{9B348AC7-D1F4-4DBB-970A-CF4D2A4E5857}" type="datetimeFigureOut">
               <a:rPr lang="nl-NL" smtClean="0"/>
-              <a:t>11-6-2026</a:t>
+              <a:t>17-6-2026</a:t>
             </a:fld>
             <a:endParaRPr lang="nl-NL"/>
           </a:p>
@@ -1387,7 +1392,7 @@
           <a:p>
             <a:fld id="{250C08FC-E505-46BB-98EF-158A0C71FCC9}" type="slidenum">
               <a:rPr lang="nl-NL" smtClean="0"/>
-              <a:t>‹#›</a:t>
+              <a:t>‹nr.›</a:t>
             </a:fld>
             <a:endParaRPr lang="nl-NL"/>
           </a:p>
@@ -1609,7 +1614,7 @@
           <a:p>
             <a:fld id="{9B348AC7-D1F4-4DBB-970A-CF4D2A4E5857}" type="datetimeFigureOut">
               <a:rPr lang="nl-NL" smtClean="0"/>
-              <a:t>11-6-2026</a:t>
+              <a:t>17-6-2026</a:t>
             </a:fld>
             <a:endParaRPr lang="nl-NL"/>
           </a:p>
@@ -1663,7 +1668,7 @@
           <a:p>
             <a:fld id="{250C08FC-E505-46BB-98EF-158A0C71FCC9}" type="slidenum">
               <a:rPr lang="nl-NL" smtClean="0"/>
-              <a:t>‹#›</a:t>
+              <a:t>‹nr.›</a:t>
             </a:fld>
             <a:endParaRPr lang="nl-NL"/>
           </a:p>
@@ -1877,7 +1882,7 @@
           <a:p>
             <a:fld id="{9B348AC7-D1F4-4DBB-970A-CF4D2A4E5857}" type="datetimeFigureOut">
               <a:rPr lang="nl-NL" smtClean="0"/>
-              <a:t>11-6-2026</a:t>
+              <a:t>17-6-2026</a:t>
             </a:fld>
             <a:endParaRPr lang="nl-NL"/>
           </a:p>
@@ -1931,7 +1936,7 @@
           <a:p>
             <a:fld id="{250C08FC-E505-46BB-98EF-158A0C71FCC9}" type="slidenum">
               <a:rPr lang="nl-NL" smtClean="0"/>
-              <a:t>‹#›</a:t>
+              <a:t>‹nr.›</a:t>
             </a:fld>
             <a:endParaRPr lang="nl-NL"/>
           </a:p>
@@ -2292,7 +2297,7 @@
           <a:p>
             <a:fld id="{9B348AC7-D1F4-4DBB-970A-CF4D2A4E5857}" type="datetimeFigureOut">
               <a:rPr lang="nl-NL" smtClean="0"/>
-              <a:t>11-6-2026</a:t>
+              <a:t>17-6-2026</a:t>
             </a:fld>
             <a:endParaRPr lang="nl-NL"/>
           </a:p>
@@ -2346,7 +2351,7 @@
           <a:p>
             <a:fld id="{250C08FC-E505-46BB-98EF-158A0C71FCC9}" type="slidenum">
               <a:rPr lang="nl-NL" smtClean="0"/>
-              <a:t>‹#›</a:t>
+              <a:t>‹nr.›</a:t>
             </a:fld>
             <a:endParaRPr lang="nl-NL"/>
           </a:p>
@@ -2434,7 +2439,7 @@
           <a:p>
             <a:fld id="{9B348AC7-D1F4-4DBB-970A-CF4D2A4E5857}" type="datetimeFigureOut">
               <a:rPr lang="nl-NL" smtClean="0"/>
-              <a:t>11-6-2026</a:t>
+              <a:t>17-6-2026</a:t>
             </a:fld>
             <a:endParaRPr lang="nl-NL"/>
           </a:p>
@@ -2488,7 +2493,7 @@
           <a:p>
             <a:fld id="{250C08FC-E505-46BB-98EF-158A0C71FCC9}" type="slidenum">
               <a:rPr lang="nl-NL" smtClean="0"/>
-              <a:t>‹#›</a:t>
+              <a:t>‹nr.›</a:t>
             </a:fld>
             <a:endParaRPr lang="nl-NL"/>
           </a:p>
@@ -2547,7 +2552,7 @@
           <a:p>
             <a:fld id="{9B348AC7-D1F4-4DBB-970A-CF4D2A4E5857}" type="datetimeFigureOut">
               <a:rPr lang="nl-NL" smtClean="0"/>
-              <a:t>11-6-2026</a:t>
+              <a:t>17-6-2026</a:t>
             </a:fld>
             <a:endParaRPr lang="nl-NL"/>
           </a:p>
@@ -2601,7 +2606,7 @@
           <a:p>
             <a:fld id="{250C08FC-E505-46BB-98EF-158A0C71FCC9}" type="slidenum">
               <a:rPr lang="nl-NL" smtClean="0"/>
-              <a:t>‹#›</a:t>
+              <a:t>‹nr.›</a:t>
             </a:fld>
             <a:endParaRPr lang="nl-NL"/>
           </a:p>
@@ -2860,7 +2865,7 @@
           <a:p>
             <a:fld id="{9B348AC7-D1F4-4DBB-970A-CF4D2A4E5857}" type="datetimeFigureOut">
               <a:rPr lang="nl-NL" smtClean="0"/>
-              <a:t>11-6-2026</a:t>
+              <a:t>17-6-2026</a:t>
             </a:fld>
             <a:endParaRPr lang="nl-NL"/>
           </a:p>
@@ -2914,7 +2919,7 @@
           <a:p>
             <a:fld id="{250C08FC-E505-46BB-98EF-158A0C71FCC9}" type="slidenum">
               <a:rPr lang="nl-NL" smtClean="0"/>
-              <a:t>‹#›</a:t>
+              <a:t>‹nr.›</a:t>
             </a:fld>
             <a:endParaRPr lang="nl-NL"/>
           </a:p>
@@ -3149,7 +3154,7 @@
           <a:p>
             <a:fld id="{9B348AC7-D1F4-4DBB-970A-CF4D2A4E5857}" type="datetimeFigureOut">
               <a:rPr lang="nl-NL" smtClean="0"/>
-              <a:t>11-6-2026</a:t>
+              <a:t>17-6-2026</a:t>
             </a:fld>
             <a:endParaRPr lang="nl-NL"/>
           </a:p>
@@ -3203,7 +3208,7 @@
           <a:p>
             <a:fld id="{250C08FC-E505-46BB-98EF-158A0C71FCC9}" type="slidenum">
               <a:rPr lang="nl-NL" smtClean="0"/>
-              <a:t>‹#›</a:t>
+              <a:t>‹nr.›</a:t>
             </a:fld>
             <a:endParaRPr lang="nl-NL"/>
           </a:p>
@@ -3392,7 +3397,7 @@
           <a:p>
             <a:fld id="{9B348AC7-D1F4-4DBB-970A-CF4D2A4E5857}" type="datetimeFigureOut">
               <a:rPr lang="nl-NL" smtClean="0"/>
-              <a:t>11-6-2026</a:t>
+              <a:t>17-6-2026</a:t>
             </a:fld>
             <a:endParaRPr lang="nl-NL"/>
           </a:p>
@@ -3482,7 +3487,7 @@
           <a:p>
             <a:fld id="{250C08FC-E505-46BB-98EF-158A0C71FCC9}" type="slidenum">
               <a:rPr lang="nl-NL" smtClean="0"/>
-              <a:t>‹#›</a:t>
+              <a:t>‹nr.›</a:t>
             </a:fld>
             <a:endParaRPr lang="nl-NL"/>
           </a:p>
@@ -3955,8 +3960,8 @@
           </a:p>
         </p:txBody>
       </p:sp>
-      <mc:AlternateContent xmlns:mc="http://schemas.openxmlformats.org/markup-compatibility/2006">
-        <mc:Choice xmlns:a14="http://schemas.microsoft.com/office/drawing/2010/main" Requires="a14">
+      <mc:AlternateContent xmlns:mc="http://schemas.openxmlformats.org/markup-compatibility/2006" xmlns:a14="http://schemas.microsoft.com/office/drawing/2010/main">
+        <mc:Choice Requires="a14">
           <p:sp>
             <p:nvSpPr>
               <p:cNvPr id="3" name="Content Placeholder 2">
@@ -4295,7 +4300,7 @@
             </p:txBody>
           </p:sp>
         </mc:Choice>
-        <mc:Fallback>
+        <mc:Fallback xmlns="">
           <p:sp>
             <p:nvSpPr>
               <p:cNvPr id="3" name="Content Placeholder 2">
@@ -6039,8 +6044,8 @@
           </a:p>
         </p:txBody>
       </p:sp>
-      <mc:AlternateContent xmlns:mc="http://schemas.openxmlformats.org/markup-compatibility/2006">
-        <mc:Choice xmlns:a14="http://schemas.microsoft.com/office/drawing/2010/main" Requires="a14">
+      <mc:AlternateContent xmlns:mc="http://schemas.openxmlformats.org/markup-compatibility/2006" xmlns:a14="http://schemas.microsoft.com/office/drawing/2010/main">
+        <mc:Choice Requires="a14">
           <p:sp>
             <p:nvSpPr>
               <p:cNvPr id="3" name="Content Placeholder 2">
@@ -6380,7 +6385,7 @@
             </p:txBody>
           </p:sp>
         </mc:Choice>
-        <mc:Fallback>
+        <mc:Fallback xmlns="">
           <p:sp>
             <p:nvSpPr>
               <p:cNvPr id="3" name="Content Placeholder 2">
@@ -10768,7 +10773,7 @@
               </a:lnSpc>
             </a:pPr>
             <a:r>
-              <a:rPr lang="nl-NL" sz="1800" dirty="0" err="1"/>
+              <a:rPr lang="nl-NL" sz="1800" b="1" dirty="0" err="1"/>
               <a:t>Bamojax</a:t>
             </a:r>
             <a:r>
@@ -10992,46 +10997,6 @@
               <a:rPr lang="nl-NL" sz="1400" dirty="0"/>
               <a:t> et al., 2025, Bayes. Ana.)</a:t>
             </a:r>
-          </a:p>
-        </p:txBody>
-      </p:sp>
-      <p:sp>
-        <p:nvSpPr>
-          <p:cNvPr id="4" name="Tekstvak 3">
-            <a:extLst>
-              <a:ext uri="{FF2B5EF4-FFF2-40B4-BE49-F238E27FC236}">
-                <a16:creationId xmlns:a16="http://schemas.microsoft.com/office/drawing/2014/main" id="{4613CE5E-4B6A-ED6B-503F-507CDB925E5D}"/>
-              </a:ext>
-            </a:extLst>
-          </p:cNvPr>
-          <p:cNvSpPr txBox="1"/>
-          <p:nvPr/>
-        </p:nvSpPr>
-        <p:spPr>
-          <a:xfrm>
-            <a:off x="9509760" y="6492875"/>
-            <a:ext cx="2604211" cy="307777"/>
-          </a:xfrm>
-          <a:prstGeom prst="rect">
-            <a:avLst/>
-          </a:prstGeom>
-          <a:noFill/>
-        </p:spPr>
-        <p:txBody>
-          <a:bodyPr wrap="square" rtlCol="0">
-            <a:spAutoFit/>
-          </a:bodyPr>
-          <a:lstStyle/>
-          <a:p>
-            <a:r>
-              <a:rPr lang="nl-NL" sz="1400" dirty="0"/>
-              <a:t>*: posterior model </a:t>
-            </a:r>
-            <a:r>
-              <a:rPr lang="nl-NL" sz="1400" dirty="0" err="1"/>
-              <a:t>probabilities</a:t>
-            </a:r>
-            <a:endParaRPr lang="nl-NL" sz="1400" dirty="0"/>
           </a:p>
         </p:txBody>
       </p:sp>
@@ -11125,6 +11090,538 @@
   <p:cSld>
     <p:spTree>
       <p:nvGrpSpPr>
+        <p:cNvPr id="1" name="">
+          <a:extLst>
+            <a:ext uri="{FF2B5EF4-FFF2-40B4-BE49-F238E27FC236}">
+              <a16:creationId xmlns:a16="http://schemas.microsoft.com/office/drawing/2014/main" id="{1188872E-D369-88F2-759B-E17782E45A06}"/>
+            </a:ext>
+          </a:extLst>
+        </p:cNvPr>
+        <p:cNvGrpSpPr/>
+        <p:nvPr/>
+      </p:nvGrpSpPr>
+      <p:grpSpPr>
+        <a:xfrm>
+          <a:off x="0" y="0"/>
+          <a:ext cx="0" cy="0"/>
+          <a:chOff x="0" y="0"/>
+          <a:chExt cx="0" cy="0"/>
+        </a:xfrm>
+      </p:grpSpPr>
+      <p:sp>
+        <p:nvSpPr>
+          <p:cNvPr id="2" name="Titel 1">
+            <a:extLst>
+              <a:ext uri="{FF2B5EF4-FFF2-40B4-BE49-F238E27FC236}">
+                <a16:creationId xmlns:a16="http://schemas.microsoft.com/office/drawing/2014/main" id="{07577FBC-287D-DDBD-E9FA-ADBAD42CB166}"/>
+              </a:ext>
+            </a:extLst>
+          </p:cNvPr>
+          <p:cNvSpPr>
+            <a:spLocks noGrp="1"/>
+          </p:cNvSpPr>
+          <p:nvPr>
+            <p:ph type="title"/>
+          </p:nvPr>
+        </p:nvSpPr>
+        <p:spPr/>
+        <p:txBody>
+          <a:bodyPr/>
+          <a:lstStyle/>
+          <a:p>
+            <a:r>
+              <a:rPr lang="nl-NL" dirty="0" err="1"/>
+              <a:t>Coding</a:t>
+            </a:r>
+            <a:r>
+              <a:rPr lang="nl-NL" dirty="0"/>
+              <a:t> setup</a:t>
+            </a:r>
+          </a:p>
+        </p:txBody>
+      </p:sp>
+      <p:sp>
+        <p:nvSpPr>
+          <p:cNvPr id="3" name="Tijdelijke aanduiding voor tekst 2">
+            <a:extLst>
+              <a:ext uri="{FF2B5EF4-FFF2-40B4-BE49-F238E27FC236}">
+                <a16:creationId xmlns:a16="http://schemas.microsoft.com/office/drawing/2014/main" id="{5F6322AC-0AF9-2340-D448-AAFFABF0F1EA}"/>
+              </a:ext>
+            </a:extLst>
+          </p:cNvPr>
+          <p:cNvSpPr>
+            <a:spLocks noGrp="1"/>
+          </p:cNvSpPr>
+          <p:nvPr>
+            <p:ph type="body" idx="1"/>
+          </p:nvPr>
+        </p:nvSpPr>
+        <p:spPr/>
+        <p:txBody>
+          <a:bodyPr/>
+          <a:lstStyle/>
+          <a:p>
+            <a:r>
+              <a:rPr lang="nl-NL" dirty="0"/>
+              <a:t>Time </a:t>
+            </a:r>
+            <a:r>
+              <a:rPr lang="nl-NL" dirty="0" err="1"/>
+              <a:t>to</a:t>
+            </a:r>
+            <a:r>
+              <a:rPr lang="nl-NL" dirty="0"/>
+              <a:t> get </a:t>
+            </a:r>
+            <a:r>
+              <a:rPr lang="nl-NL" dirty="0" err="1"/>
+              <a:t>to</a:t>
+            </a:r>
+            <a:r>
+              <a:rPr lang="nl-NL" dirty="0"/>
+              <a:t> </a:t>
+            </a:r>
+            <a:r>
+              <a:rPr lang="nl-NL" dirty="0" err="1"/>
+              <a:t>work</a:t>
+            </a:r>
+            <a:r>
+              <a:rPr lang="nl-NL" dirty="0"/>
+              <a:t>!</a:t>
+            </a:r>
+          </a:p>
+        </p:txBody>
+      </p:sp>
+    </p:spTree>
+    <p:extLst>
+      <p:ext uri="{BB962C8B-B14F-4D97-AF65-F5344CB8AC3E}">
+        <p14:creationId xmlns:p14="http://schemas.microsoft.com/office/powerpoint/2010/main" val="665367241"/>
+      </p:ext>
+    </p:extLst>
+  </p:cSld>
+  <p:clrMapOvr>
+    <a:masterClrMapping/>
+  </p:clrMapOvr>
+</p:sld>
+</file>
+
+<file path=ppt/slides/slide22.xml><?xml version="1.0" encoding="utf-8"?>
+<p:sld xmlns:a="http://schemas.openxmlformats.org/drawingml/2006/main" xmlns:r="http://schemas.openxmlformats.org/officeDocument/2006/relationships" xmlns:p="http://schemas.openxmlformats.org/presentationml/2006/main">
+  <p:cSld>
+    <p:spTree>
+      <p:nvGrpSpPr>
+        <p:cNvPr id="1" name="">
+          <a:extLst>
+            <a:ext uri="{FF2B5EF4-FFF2-40B4-BE49-F238E27FC236}">
+              <a16:creationId xmlns:a16="http://schemas.microsoft.com/office/drawing/2014/main" id="{99B97B0B-DE92-9ACE-AA9F-7CDBD5CA1791}"/>
+            </a:ext>
+          </a:extLst>
+        </p:cNvPr>
+        <p:cNvGrpSpPr/>
+        <p:nvPr/>
+      </p:nvGrpSpPr>
+      <p:grpSpPr>
+        <a:xfrm>
+          <a:off x="0" y="0"/>
+          <a:ext cx="0" cy="0"/>
+          <a:chOff x="0" y="0"/>
+          <a:chExt cx="0" cy="0"/>
+        </a:xfrm>
+      </p:grpSpPr>
+      <p:sp>
+        <p:nvSpPr>
+          <p:cNvPr id="2" name="Titel 1">
+            <a:extLst>
+              <a:ext uri="{FF2B5EF4-FFF2-40B4-BE49-F238E27FC236}">
+                <a16:creationId xmlns:a16="http://schemas.microsoft.com/office/drawing/2014/main" id="{FF11AA84-1453-D6A1-91A4-26861715B5B4}"/>
+              </a:ext>
+            </a:extLst>
+          </p:cNvPr>
+          <p:cNvSpPr>
+            <a:spLocks noGrp="1"/>
+          </p:cNvSpPr>
+          <p:nvPr>
+            <p:ph type="title"/>
+          </p:nvPr>
+        </p:nvSpPr>
+        <p:spPr/>
+        <p:txBody>
+          <a:bodyPr/>
+          <a:lstStyle/>
+          <a:p>
+            <a:r>
+              <a:rPr lang="nl-NL" dirty="0" err="1"/>
+              <a:t>Getting</a:t>
+            </a:r>
+            <a:r>
+              <a:rPr lang="nl-NL" dirty="0"/>
+              <a:t> </a:t>
+            </a:r>
+            <a:r>
+              <a:rPr lang="nl-NL" dirty="0" err="1"/>
+              <a:t>started</a:t>
+            </a:r>
+            <a:endParaRPr lang="nl-NL" dirty="0"/>
+          </a:p>
+        </p:txBody>
+      </p:sp>
+      <p:sp>
+        <p:nvSpPr>
+          <p:cNvPr id="3" name="Tijdelijke aanduiding voor inhoud 2">
+            <a:extLst>
+              <a:ext uri="{FF2B5EF4-FFF2-40B4-BE49-F238E27FC236}">
+                <a16:creationId xmlns:a16="http://schemas.microsoft.com/office/drawing/2014/main" id="{786022A3-65A6-EC49-E646-1FB0B9CD47A4}"/>
+              </a:ext>
+            </a:extLst>
+          </p:cNvPr>
+          <p:cNvSpPr>
+            <a:spLocks noGrp="1"/>
+          </p:cNvSpPr>
+          <p:nvPr>
+            <p:ph idx="1"/>
+          </p:nvPr>
+        </p:nvSpPr>
+        <p:spPr>
+          <a:xfrm>
+            <a:off x="838199" y="1889236"/>
+            <a:ext cx="10611679" cy="3557408"/>
+          </a:xfrm>
+        </p:spPr>
+        <p:txBody>
+          <a:bodyPr>
+            <a:normAutofit/>
+          </a:bodyPr>
+          <a:lstStyle/>
+          <a:p>
+            <a:r>
+              <a:rPr lang="nl-NL" sz="1800" dirty="0"/>
+              <a:t>We experiment </a:t>
+            </a:r>
+            <a:r>
+              <a:rPr lang="nl-NL" sz="1800" dirty="0" err="1"/>
+              <a:t>with</a:t>
+            </a:r>
+            <a:r>
+              <a:rPr lang="nl-NL" sz="1800" dirty="0"/>
+              <a:t> </a:t>
+            </a:r>
+            <a:r>
+              <a:rPr lang="nl-NL" sz="1800" dirty="0" err="1"/>
+              <a:t>implementing</a:t>
+            </a:r>
+            <a:r>
+              <a:rPr lang="nl-NL" sz="1800" dirty="0"/>
+              <a:t> BMA </a:t>
+            </a:r>
+            <a:r>
+              <a:rPr lang="nl-NL" sz="1800" dirty="0" err="1"/>
+              <a:t>for</a:t>
+            </a:r>
+            <a:r>
+              <a:rPr lang="nl-NL" sz="1800" dirty="0"/>
+              <a:t> </a:t>
+            </a:r>
+            <a:r>
+              <a:rPr lang="nl-NL" sz="1800" dirty="0" err="1"/>
+              <a:t>increasingly</a:t>
+            </a:r>
+            <a:r>
+              <a:rPr lang="nl-NL" sz="1800" dirty="0"/>
+              <a:t> relevant </a:t>
+            </a:r>
+            <a:r>
+              <a:rPr lang="nl-NL" sz="1800" dirty="0" err="1"/>
+              <a:t>models</a:t>
+            </a:r>
+            <a:r>
+              <a:rPr lang="nl-NL" sz="1800" dirty="0"/>
+              <a:t>.</a:t>
+            </a:r>
+          </a:p>
+          <a:p>
+            <a:r>
+              <a:rPr lang="nl-NL" sz="1800" dirty="0" err="1"/>
+              <a:t>All</a:t>
+            </a:r>
+            <a:r>
+              <a:rPr lang="nl-NL" sz="1800" dirty="0"/>
+              <a:t> </a:t>
+            </a:r>
+            <a:r>
+              <a:rPr lang="nl-NL" sz="1800" dirty="0" err="1"/>
+              <a:t>materials</a:t>
+            </a:r>
+            <a:r>
+              <a:rPr lang="nl-NL" sz="1800" dirty="0"/>
+              <a:t> </a:t>
+            </a:r>
+            <a:r>
+              <a:rPr lang="nl-NL" sz="1800" dirty="0" err="1"/>
+              <a:t>for</a:t>
+            </a:r>
+            <a:r>
+              <a:rPr lang="nl-NL" sz="1800" dirty="0"/>
+              <a:t> </a:t>
+            </a:r>
+            <a:r>
+              <a:rPr lang="nl-NL" sz="1800" dirty="0" err="1"/>
+              <a:t>today</a:t>
+            </a:r>
+            <a:r>
+              <a:rPr lang="nl-NL" sz="1800" dirty="0"/>
+              <a:t> are </a:t>
+            </a:r>
+            <a:r>
+              <a:rPr lang="nl-NL" sz="1800" dirty="0" err="1"/>
+              <a:t>available</a:t>
+            </a:r>
+            <a:r>
+              <a:rPr lang="nl-NL" sz="1800" dirty="0"/>
+              <a:t> on </a:t>
+            </a:r>
+            <a:r>
+              <a:rPr lang="nl-NL" sz="1800" dirty="0">
+                <a:hlinkClick r:id="rId2"/>
+              </a:rPr>
+              <a:t>https://github.com/UncertaintyInComplexSystems/BMA_Workshop</a:t>
+            </a:r>
+            <a:r>
+              <a:rPr lang="nl-NL" sz="1800" dirty="0"/>
+              <a:t>.</a:t>
+            </a:r>
+          </a:p>
+          <a:p>
+            <a:r>
+              <a:rPr lang="nl-NL" sz="1800" dirty="0" err="1"/>
+              <a:t>Note</a:t>
+            </a:r>
+            <a:r>
+              <a:rPr lang="nl-NL" sz="1800" dirty="0"/>
+              <a:t>: </a:t>
+            </a:r>
+            <a:r>
+              <a:rPr lang="nl-NL" sz="1800" dirty="0" err="1"/>
+              <a:t>Installing</a:t>
+            </a:r>
+            <a:r>
+              <a:rPr lang="nl-NL" sz="1800" dirty="0"/>
+              <a:t> JAX </a:t>
+            </a:r>
+            <a:r>
+              <a:rPr lang="nl-NL" sz="1800" dirty="0" err="1"/>
+              <a:t>locally</a:t>
+            </a:r>
+            <a:r>
+              <a:rPr lang="nl-NL" sz="1800" dirty="0"/>
+              <a:t> (</a:t>
+            </a:r>
+            <a:r>
+              <a:rPr lang="nl-NL" sz="1800" dirty="0" err="1"/>
+              <a:t>and</a:t>
+            </a:r>
+            <a:r>
+              <a:rPr lang="nl-NL" sz="1800" dirty="0"/>
+              <a:t> </a:t>
+            </a:r>
+            <a:r>
+              <a:rPr lang="nl-NL" sz="1800" dirty="0" err="1"/>
+              <a:t>having</a:t>
+            </a:r>
+            <a:r>
+              <a:rPr lang="nl-NL" sz="1800" dirty="0"/>
+              <a:t> </a:t>
+            </a:r>
+            <a:r>
+              <a:rPr lang="nl-NL" sz="1800" dirty="0" err="1"/>
+              <a:t>it</a:t>
+            </a:r>
+            <a:r>
+              <a:rPr lang="nl-NL" sz="1800" dirty="0"/>
+              <a:t> </a:t>
+            </a:r>
+            <a:r>
+              <a:rPr lang="nl-NL" sz="1800" dirty="0" err="1"/>
+              <a:t>work</a:t>
+            </a:r>
+            <a:r>
+              <a:rPr lang="nl-NL" sz="1800" dirty="0"/>
+              <a:t> </a:t>
+            </a:r>
+            <a:r>
+              <a:rPr lang="nl-NL" sz="1800" dirty="0" err="1"/>
+              <a:t>with</a:t>
+            </a:r>
+            <a:r>
+              <a:rPr lang="nl-NL" sz="1800" dirty="0"/>
+              <a:t> </a:t>
+            </a:r>
+            <a:r>
+              <a:rPr lang="nl-NL" sz="1800" dirty="0" err="1"/>
+              <a:t>your</a:t>
+            </a:r>
+            <a:r>
+              <a:rPr lang="nl-NL" sz="1800" dirty="0"/>
+              <a:t> GPU) takes </a:t>
+            </a:r>
+            <a:r>
+              <a:rPr lang="nl-NL" sz="1800" dirty="0" err="1"/>
+              <a:t>some</a:t>
+            </a:r>
+            <a:r>
+              <a:rPr lang="nl-NL" sz="1800" dirty="0"/>
+              <a:t> effort. Quick solution: </a:t>
+            </a:r>
+            <a:r>
+              <a:rPr lang="nl-NL" sz="1800" b="1" dirty="0" err="1"/>
+              <a:t>use</a:t>
+            </a:r>
+            <a:r>
+              <a:rPr lang="nl-NL" sz="1800" b="1" dirty="0"/>
+              <a:t> Google </a:t>
+            </a:r>
+            <a:r>
+              <a:rPr lang="nl-NL" sz="1800" b="1" dirty="0" err="1"/>
+              <a:t>Colab</a:t>
+            </a:r>
+            <a:r>
+              <a:rPr lang="nl-NL" sz="1800" dirty="0"/>
+              <a:t>.</a:t>
+            </a:r>
+          </a:p>
+          <a:p>
+            <a:pPr lvl="1"/>
+            <a:r>
+              <a:rPr lang="nl-NL" sz="1600" dirty="0"/>
+              <a:t>Set </a:t>
+            </a:r>
+            <a:r>
+              <a:rPr lang="nl-NL" sz="1600" dirty="0" err="1"/>
+              <a:t>runtime</a:t>
+            </a:r>
+            <a:r>
+              <a:rPr lang="nl-NL" sz="1600" dirty="0"/>
+              <a:t> </a:t>
+            </a:r>
+            <a:r>
+              <a:rPr lang="nl-NL" sz="1600" dirty="0" err="1"/>
+              <a:t>to</a:t>
+            </a:r>
+            <a:r>
+              <a:rPr lang="nl-NL" sz="1600" dirty="0"/>
+              <a:t> GPU </a:t>
+            </a:r>
+            <a:r>
+              <a:rPr lang="nl-NL" sz="1600" dirty="0" err="1"/>
+              <a:t>to</a:t>
+            </a:r>
+            <a:r>
+              <a:rPr lang="nl-NL" sz="1600" dirty="0"/>
+              <a:t> benefit </a:t>
+            </a:r>
+            <a:r>
+              <a:rPr lang="nl-NL" sz="1600" dirty="0" err="1"/>
+              <a:t>from</a:t>
+            </a:r>
+            <a:r>
+              <a:rPr lang="nl-NL" sz="1600" dirty="0"/>
+              <a:t> JAX/</a:t>
+            </a:r>
+            <a:r>
+              <a:rPr lang="nl-NL" sz="1600" dirty="0" err="1"/>
+              <a:t>bamojax</a:t>
+            </a:r>
+            <a:r>
+              <a:rPr lang="nl-NL" sz="1600" dirty="0"/>
+              <a:t> speed!</a:t>
+            </a:r>
+          </a:p>
+          <a:p>
+            <a:pPr lvl="1"/>
+            <a:r>
+              <a:rPr lang="nl-NL" sz="1600" dirty="0" err="1"/>
+              <a:t>You</a:t>
+            </a:r>
+            <a:r>
+              <a:rPr lang="nl-NL" sz="1600" dirty="0"/>
+              <a:t> </a:t>
+            </a:r>
+            <a:r>
+              <a:rPr lang="nl-NL" sz="1600" dirty="0" err="1"/>
+              <a:t>can</a:t>
+            </a:r>
+            <a:r>
+              <a:rPr lang="nl-NL" sz="1600" dirty="0"/>
+              <a:t> open files </a:t>
+            </a:r>
+            <a:r>
+              <a:rPr lang="nl-NL" sz="1600" dirty="0" err="1"/>
+              <a:t>from</a:t>
+            </a:r>
+            <a:r>
+              <a:rPr lang="nl-NL" sz="1600" dirty="0"/>
+              <a:t> </a:t>
+            </a:r>
+            <a:r>
+              <a:rPr lang="nl-NL" sz="1600" dirty="0" err="1"/>
+              <a:t>Github</a:t>
+            </a:r>
+            <a:r>
+              <a:rPr lang="nl-NL" sz="1600" dirty="0"/>
+              <a:t> </a:t>
+            </a:r>
+            <a:r>
+              <a:rPr lang="nl-NL" sz="1600" dirty="0" err="1"/>
+              <a:t>directly</a:t>
+            </a:r>
+            <a:r>
+              <a:rPr lang="nl-NL" sz="1600" dirty="0"/>
+              <a:t>! File -&gt; Open Notebook -&gt; </a:t>
+            </a:r>
+            <a:r>
+              <a:rPr lang="nl-NL" sz="1600" dirty="0" err="1"/>
+              <a:t>Github</a:t>
+            </a:r>
+            <a:r>
+              <a:rPr lang="nl-NL" sz="1600" dirty="0"/>
+              <a:t> -&gt; enter ‘</a:t>
+            </a:r>
+            <a:r>
+              <a:rPr lang="nl-NL" sz="1600" dirty="0" err="1"/>
+              <a:t>UncertaintyInComplexSystems</a:t>
+            </a:r>
+            <a:r>
+              <a:rPr lang="nl-NL" sz="1600" dirty="0"/>
+              <a:t>’ -&gt; select </a:t>
+            </a:r>
+            <a:r>
+              <a:rPr lang="nl-NL" sz="1600" dirty="0" err="1"/>
+              <a:t>BMA_Workshop</a:t>
+            </a:r>
+            <a:endParaRPr lang="nl-NL" sz="1600" dirty="0"/>
+          </a:p>
+          <a:p>
+            <a:endParaRPr lang="nl-NL" sz="1800" dirty="0"/>
+          </a:p>
+        </p:txBody>
+      </p:sp>
+    </p:spTree>
+    <p:extLst>
+      <p:ext uri="{BB962C8B-B14F-4D97-AF65-F5344CB8AC3E}">
+        <p14:creationId xmlns:p14="http://schemas.microsoft.com/office/powerpoint/2010/main" val="3566699934"/>
+      </p:ext>
+    </p:extLst>
+  </p:cSld>
+  <p:clrMapOvr>
+    <a:masterClrMapping/>
+  </p:clrMapOvr>
+</p:sld>
+</file>
+
+<file path=ppt/slides/slide23.xml><?xml version="1.0" encoding="utf-8"?>
+<p:sld xmlns:a="http://schemas.openxmlformats.org/drawingml/2006/main" xmlns:r="http://schemas.openxmlformats.org/officeDocument/2006/relationships" xmlns:p="http://schemas.openxmlformats.org/presentationml/2006/main">
+  <p:cSld>
+    <p:spTree>
+      <p:nvGrpSpPr>
         <p:cNvPr id="1" name=""/>
         <p:cNvGrpSpPr/>
         <p:nvPr/>
@@ -11139,10 +11636,64 @@
       </p:grpSpPr>
       <p:sp>
         <p:nvSpPr>
-          <p:cNvPr id="4" name="Title 3">
+          <p:cNvPr id="6" name="Rechthoek 5">
             <a:extLst>
               <a:ext uri="{FF2B5EF4-FFF2-40B4-BE49-F238E27FC236}">
-                <a16:creationId xmlns:a16="http://schemas.microsoft.com/office/drawing/2014/main" id="{A2F6279A-8A72-9C55-FA99-FD1E293FD6E3}"/>
+                <a16:creationId xmlns:a16="http://schemas.microsoft.com/office/drawing/2014/main" id="{3A7B905A-A6C4-89B2-E65A-06BE432679EB}"/>
+              </a:ext>
+            </a:extLst>
+          </p:cNvPr>
+          <p:cNvSpPr/>
+          <p:nvPr/>
+        </p:nvSpPr>
+        <p:spPr>
+          <a:xfrm>
+            <a:off x="838198" y="2106860"/>
+            <a:ext cx="11025147" cy="3673737"/>
+          </a:xfrm>
+          <a:prstGeom prst="rect">
+            <a:avLst/>
+          </a:prstGeom>
+          <a:solidFill>
+            <a:schemeClr val="bg1">
+              <a:lumMod val="85000"/>
+            </a:schemeClr>
+          </a:solidFill>
+          <a:ln>
+            <a:noFill/>
+          </a:ln>
+        </p:spPr>
+        <p:style>
+          <a:lnRef idx="2">
+            <a:schemeClr val="accent1">
+              <a:shade val="15000"/>
+            </a:schemeClr>
+          </a:lnRef>
+          <a:fillRef idx="1">
+            <a:schemeClr val="accent1"/>
+          </a:fillRef>
+          <a:effectRef idx="0">
+            <a:schemeClr val="accent1"/>
+          </a:effectRef>
+          <a:fontRef idx="minor">
+            <a:schemeClr val="lt1"/>
+          </a:fontRef>
+        </p:style>
+        <p:txBody>
+          <a:bodyPr rtlCol="0" anchor="ctr"/>
+          <a:lstStyle/>
+          <a:p>
+            <a:pPr algn="ctr"/>
+            <a:endParaRPr lang="nl-NL"/>
+          </a:p>
+        </p:txBody>
+      </p:sp>
+      <p:sp>
+        <p:nvSpPr>
+          <p:cNvPr id="2" name="Titel 1">
+            <a:extLst>
+              <a:ext uri="{FF2B5EF4-FFF2-40B4-BE49-F238E27FC236}">
+                <a16:creationId xmlns:a16="http://schemas.microsoft.com/office/drawing/2014/main" id="{6C1CB737-24FE-766E-051F-76C27E2E9909}"/>
               </a:ext>
             </a:extLst>
           </p:cNvPr>
@@ -11150,7 +11701,7 @@
             <a:spLocks noGrp="1"/>
           </p:cNvSpPr>
           <p:nvPr>
-            <p:ph type="ctrTitle"/>
+            <p:ph type="title"/>
           </p:nvPr>
         </p:nvSpPr>
         <p:spPr/>
@@ -11158,16 +11709,28 @@
           <a:bodyPr/>
           <a:lstStyle/>
           <a:p>
-            <a:endParaRPr lang="nl-NL"/>
+            <a:r>
+              <a:rPr lang="nl-NL" dirty="0" err="1"/>
+              <a:t>Getting</a:t>
+            </a:r>
+            <a:r>
+              <a:rPr lang="nl-NL" dirty="0"/>
+              <a:t> </a:t>
+            </a:r>
+            <a:r>
+              <a:rPr lang="nl-NL" dirty="0" err="1"/>
+              <a:t>started</a:t>
+            </a:r>
+            <a:endParaRPr lang="nl-NL" dirty="0"/>
           </a:p>
         </p:txBody>
       </p:sp>
       <p:sp>
         <p:nvSpPr>
-          <p:cNvPr id="5" name="Subtitle 4">
+          <p:cNvPr id="3" name="Tijdelijke aanduiding voor inhoud 2">
             <a:extLst>
               <a:ext uri="{FF2B5EF4-FFF2-40B4-BE49-F238E27FC236}">
-                <a16:creationId xmlns:a16="http://schemas.microsoft.com/office/drawing/2014/main" id="{91945EC5-D9AE-3518-E403-388B5FFC79F2}"/>
+                <a16:creationId xmlns:a16="http://schemas.microsoft.com/office/drawing/2014/main" id="{94A05BF0-07E5-839A-CDEE-73CDF3CB1509}"/>
               </a:ext>
             </a:extLst>
           </p:cNvPr>
@@ -11175,15 +11738,715 @@
             <a:spLocks noGrp="1"/>
           </p:cNvSpPr>
           <p:nvPr>
-            <p:ph type="subTitle" idx="1"/>
+            <p:ph idx="1"/>
           </p:nvPr>
         </p:nvSpPr>
-        <p:spPr/>
+        <p:spPr>
+          <a:xfrm>
+            <a:off x="838199" y="1825628"/>
+            <a:ext cx="10730949" cy="4177609"/>
+          </a:xfrm>
+        </p:spPr>
         <p:txBody>
-          <a:bodyPr/>
+          <a:bodyPr>
+            <a:normAutofit fontScale="70000" lnSpcReduction="20000"/>
+          </a:bodyPr>
           <a:lstStyle/>
           <a:p>
-            <a:endParaRPr lang="nl-NL"/>
+            <a:pPr marL="0" indent="0">
+              <a:buNone/>
+            </a:pPr>
+            <a:r>
+              <a:rPr lang="nl-NL" sz="2600" dirty="0" err="1"/>
+              <a:t>Precede</a:t>
+            </a:r>
+            <a:r>
+              <a:rPr lang="nl-NL" sz="2600" dirty="0"/>
+              <a:t> </a:t>
+            </a:r>
+            <a:r>
+              <a:rPr lang="nl-NL" sz="2600" dirty="0" err="1"/>
+              <a:t>the</a:t>
+            </a:r>
+            <a:r>
+              <a:rPr lang="nl-NL" sz="2600" dirty="0"/>
+              <a:t> notebooks </a:t>
+            </a:r>
+            <a:r>
+              <a:rPr lang="nl-NL" sz="2600" dirty="0" err="1"/>
+              <a:t>with</a:t>
+            </a:r>
+            <a:r>
+              <a:rPr lang="nl-NL" sz="2600" dirty="0"/>
+              <a:t> </a:t>
+            </a:r>
+            <a:r>
+              <a:rPr lang="nl-NL" sz="2600" dirty="0" err="1"/>
+              <a:t>this</a:t>
+            </a:r>
+            <a:r>
+              <a:rPr lang="nl-NL" sz="2600" dirty="0"/>
+              <a:t> </a:t>
+            </a:r>
+            <a:r>
+              <a:rPr lang="nl-NL" sz="2600" dirty="0" err="1"/>
+              <a:t>cell</a:t>
+            </a:r>
+            <a:r>
+              <a:rPr lang="nl-NL" sz="2600" dirty="0"/>
+              <a:t> (copy-paste </a:t>
+            </a:r>
+            <a:r>
+              <a:rPr lang="nl-NL" sz="2600" dirty="0" err="1"/>
+              <a:t>from</a:t>
+            </a:r>
+            <a:r>
+              <a:rPr lang="nl-NL" sz="2600" dirty="0"/>
+              <a:t> </a:t>
+            </a:r>
+            <a:r>
+              <a:rPr lang="nl-NL" sz="2600" dirty="0" err="1"/>
+              <a:t>Github</a:t>
+            </a:r>
+            <a:r>
+              <a:rPr lang="nl-NL" sz="2600" dirty="0"/>
+              <a:t>):</a:t>
+            </a:r>
+          </a:p>
+          <a:p>
+            <a:pPr marL="0" indent="0">
+              <a:buNone/>
+            </a:pPr>
+            <a:r>
+              <a:rPr lang="nl-NL" sz="2200" i="1" dirty="0">
+                <a:latin typeface="Courier New" panose="02070309020205020404" pitchFamily="49" charset="0"/>
+                <a:cs typeface="Courier New" panose="02070309020205020404" pitchFamily="49" charset="0"/>
+              </a:rPr>
+              <a:t># We </a:t>
+            </a:r>
+            <a:r>
+              <a:rPr lang="nl-NL" sz="2200" i="1" dirty="0" err="1">
+                <a:latin typeface="Courier New" panose="02070309020205020404" pitchFamily="49" charset="0"/>
+                <a:cs typeface="Courier New" panose="02070309020205020404" pitchFamily="49" charset="0"/>
+              </a:rPr>
+              <a:t>manually</a:t>
+            </a:r>
+            <a:r>
+              <a:rPr lang="nl-NL" sz="2200" i="1" dirty="0">
+                <a:latin typeface="Courier New" panose="02070309020205020404" pitchFamily="49" charset="0"/>
+                <a:cs typeface="Courier New" panose="02070309020205020404" pitchFamily="49" charset="0"/>
+              </a:rPr>
+              <a:t> </a:t>
+            </a:r>
+            <a:r>
+              <a:rPr lang="nl-NL" sz="2200" i="1" dirty="0" err="1">
+                <a:latin typeface="Courier New" panose="02070309020205020404" pitchFamily="49" charset="0"/>
+                <a:cs typeface="Courier New" panose="02070309020205020404" pitchFamily="49" charset="0"/>
+              </a:rPr>
+              <a:t>install</a:t>
+            </a:r>
+            <a:r>
+              <a:rPr lang="nl-NL" sz="2200" i="1" dirty="0">
+                <a:latin typeface="Courier New" panose="02070309020205020404" pitchFamily="49" charset="0"/>
+                <a:cs typeface="Courier New" panose="02070309020205020404" pitchFamily="49" charset="0"/>
+              </a:rPr>
+              <a:t> </a:t>
+            </a:r>
+            <a:r>
+              <a:rPr lang="nl-NL" sz="2200" i="1" dirty="0" err="1">
+                <a:latin typeface="Courier New" panose="02070309020205020404" pitchFamily="49" charset="0"/>
+                <a:cs typeface="Courier New" panose="02070309020205020404" pitchFamily="49" charset="0"/>
+              </a:rPr>
+              <a:t>dependencies</a:t>
+            </a:r>
+            <a:endParaRPr lang="nl-NL" sz="2200" dirty="0">
+              <a:latin typeface="Courier New" panose="02070309020205020404" pitchFamily="49" charset="0"/>
+              <a:cs typeface="Courier New" panose="02070309020205020404" pitchFamily="49" charset="0"/>
+            </a:endParaRPr>
+          </a:p>
+          <a:p>
+            <a:pPr marL="0" indent="0">
+              <a:buNone/>
+            </a:pPr>
+            <a:r>
+              <a:rPr lang="nl-NL" sz="2200" dirty="0">
+                <a:latin typeface="Courier New" panose="02070309020205020404" pitchFamily="49" charset="0"/>
+                <a:cs typeface="Courier New" panose="02070309020205020404" pitchFamily="49" charset="0"/>
+              </a:rPr>
+              <a:t>!pip </a:t>
+            </a:r>
+            <a:r>
+              <a:rPr lang="nl-NL" sz="2200" dirty="0" err="1">
+                <a:latin typeface="Courier New" panose="02070309020205020404" pitchFamily="49" charset="0"/>
+                <a:cs typeface="Courier New" panose="02070309020205020404" pitchFamily="49" charset="0"/>
+              </a:rPr>
+              <a:t>install</a:t>
+            </a:r>
+            <a:r>
+              <a:rPr lang="nl-NL" sz="2200" dirty="0">
+                <a:latin typeface="Courier New" panose="02070309020205020404" pitchFamily="49" charset="0"/>
+                <a:cs typeface="Courier New" panose="02070309020205020404" pitchFamily="49" charset="0"/>
+              </a:rPr>
+              <a:t> </a:t>
+            </a:r>
+            <a:r>
+              <a:rPr lang="nl-NL" sz="2200" dirty="0" err="1">
+                <a:latin typeface="Courier New" panose="02070309020205020404" pitchFamily="49" charset="0"/>
+                <a:cs typeface="Courier New" panose="02070309020205020404" pitchFamily="49" charset="0"/>
+              </a:rPr>
+              <a:t>numpyro</a:t>
+            </a:r>
+            <a:r>
+              <a:rPr lang="nl-NL" sz="2200" dirty="0">
+                <a:latin typeface="Courier New" panose="02070309020205020404" pitchFamily="49" charset="0"/>
+                <a:cs typeface="Courier New" panose="02070309020205020404" pitchFamily="49" charset="0"/>
+              </a:rPr>
+              <a:t>==0.19.0 </a:t>
+            </a:r>
+            <a:r>
+              <a:rPr lang="nl-NL" sz="2200" dirty="0" err="1">
+                <a:latin typeface="Courier New" panose="02070309020205020404" pitchFamily="49" charset="0"/>
+                <a:cs typeface="Courier New" panose="02070309020205020404" pitchFamily="49" charset="0"/>
+              </a:rPr>
+              <a:t>blackjax</a:t>
+            </a:r>
+            <a:r>
+              <a:rPr lang="nl-NL" sz="2200" dirty="0">
+                <a:latin typeface="Courier New" panose="02070309020205020404" pitchFamily="49" charset="0"/>
+                <a:cs typeface="Courier New" panose="02070309020205020404" pitchFamily="49" charset="0"/>
+              </a:rPr>
+              <a:t>==1.2.5 </a:t>
+            </a:r>
+            <a:r>
+              <a:rPr lang="nl-NL" sz="2200" dirty="0" err="1">
+                <a:latin typeface="Courier New" panose="02070309020205020404" pitchFamily="49" charset="0"/>
+                <a:cs typeface="Courier New" panose="02070309020205020404" pitchFamily="49" charset="0"/>
+              </a:rPr>
+              <a:t>jaxtyping</a:t>
+            </a:r>
+            <a:br>
+              <a:rPr lang="nl-NL" sz="2200" dirty="0">
+                <a:latin typeface="Courier New" panose="02070309020205020404" pitchFamily="49" charset="0"/>
+                <a:cs typeface="Courier New" panose="02070309020205020404" pitchFamily="49" charset="0"/>
+              </a:rPr>
+            </a:br>
+            <a:endParaRPr lang="nl-NL" sz="2200" dirty="0">
+              <a:latin typeface="Courier New" panose="02070309020205020404" pitchFamily="49" charset="0"/>
+              <a:cs typeface="Courier New" panose="02070309020205020404" pitchFamily="49" charset="0"/>
+            </a:endParaRPr>
+          </a:p>
+          <a:p>
+            <a:pPr marL="0" indent="0">
+              <a:buNone/>
+            </a:pPr>
+            <a:r>
+              <a:rPr lang="nl-NL" sz="2200" i="1" dirty="0">
+                <a:latin typeface="Courier New" panose="02070309020205020404" pitchFamily="49" charset="0"/>
+                <a:cs typeface="Courier New" panose="02070309020205020404" pitchFamily="49" charset="0"/>
+              </a:rPr>
+              <a:t># </a:t>
+            </a:r>
+            <a:r>
+              <a:rPr lang="nl-NL" sz="2200" i="1" dirty="0" err="1">
+                <a:latin typeface="Courier New" panose="02070309020205020404" pitchFamily="49" charset="0"/>
+                <a:cs typeface="Courier New" panose="02070309020205020404" pitchFamily="49" charset="0"/>
+              </a:rPr>
+              <a:t>Install</a:t>
+            </a:r>
+            <a:r>
+              <a:rPr lang="nl-NL" sz="2200" i="1" dirty="0">
+                <a:latin typeface="Courier New" panose="02070309020205020404" pitchFamily="49" charset="0"/>
+                <a:cs typeface="Courier New" panose="02070309020205020404" pitchFamily="49" charset="0"/>
+              </a:rPr>
+              <a:t> </a:t>
+            </a:r>
+            <a:r>
+              <a:rPr lang="nl-NL" sz="2200" i="1" dirty="0" err="1">
+                <a:latin typeface="Courier New" panose="02070309020205020404" pitchFamily="49" charset="0"/>
+                <a:cs typeface="Courier New" panose="02070309020205020404" pitchFamily="49" charset="0"/>
+              </a:rPr>
+              <a:t>bamojax</a:t>
+            </a:r>
+            <a:r>
+              <a:rPr lang="nl-NL" sz="2200" i="1" dirty="0">
+                <a:latin typeface="Courier New" panose="02070309020205020404" pitchFamily="49" charset="0"/>
+                <a:cs typeface="Courier New" panose="02070309020205020404" pitchFamily="49" charset="0"/>
+              </a:rPr>
+              <a:t>, without re-</a:t>
+            </a:r>
+            <a:r>
+              <a:rPr lang="nl-NL" sz="2200" i="1" dirty="0" err="1">
+                <a:latin typeface="Courier New" panose="02070309020205020404" pitchFamily="49" charset="0"/>
+                <a:cs typeface="Courier New" panose="02070309020205020404" pitchFamily="49" charset="0"/>
+              </a:rPr>
+              <a:t>evaluating</a:t>
+            </a:r>
+            <a:r>
+              <a:rPr lang="nl-NL" sz="2200" i="1" dirty="0">
+                <a:latin typeface="Courier New" panose="02070309020205020404" pitchFamily="49" charset="0"/>
+                <a:cs typeface="Courier New" panose="02070309020205020404" pitchFamily="49" charset="0"/>
+              </a:rPr>
+              <a:t> </a:t>
+            </a:r>
+            <a:r>
+              <a:rPr lang="nl-NL" sz="2200" i="1" dirty="0" err="1">
+                <a:latin typeface="Courier New" panose="02070309020205020404" pitchFamily="49" charset="0"/>
+                <a:cs typeface="Courier New" panose="02070309020205020404" pitchFamily="49" charset="0"/>
+              </a:rPr>
+              <a:t>its</a:t>
+            </a:r>
+            <a:r>
+              <a:rPr lang="nl-NL" sz="2200" i="1" dirty="0">
+                <a:latin typeface="Courier New" panose="02070309020205020404" pitchFamily="49" charset="0"/>
+                <a:cs typeface="Courier New" panose="02070309020205020404" pitchFamily="49" charset="0"/>
+              </a:rPr>
+              <a:t> </a:t>
+            </a:r>
+            <a:r>
+              <a:rPr lang="nl-NL" sz="2200" i="1" dirty="0" err="1">
+                <a:latin typeface="Courier New" panose="02070309020205020404" pitchFamily="49" charset="0"/>
+                <a:cs typeface="Courier New" panose="02070309020205020404" pitchFamily="49" charset="0"/>
+              </a:rPr>
+              <a:t>jax</a:t>
+            </a:r>
+            <a:r>
+              <a:rPr lang="nl-NL" sz="2200" i="1" dirty="0">
+                <a:latin typeface="Courier New" panose="02070309020205020404" pitchFamily="49" charset="0"/>
+                <a:cs typeface="Courier New" panose="02070309020205020404" pitchFamily="49" charset="0"/>
+              </a:rPr>
+              <a:t>/</a:t>
+            </a:r>
+            <a:r>
+              <a:rPr lang="nl-NL" sz="2200" i="1" dirty="0" err="1">
+                <a:latin typeface="Courier New" panose="02070309020205020404" pitchFamily="49" charset="0"/>
+                <a:cs typeface="Courier New" panose="02070309020205020404" pitchFamily="49" charset="0"/>
+              </a:rPr>
+              <a:t>jaxlib</a:t>
+            </a:r>
+            <a:r>
+              <a:rPr lang="nl-NL" sz="2200" i="1" dirty="0">
+                <a:latin typeface="Courier New" panose="02070309020205020404" pitchFamily="49" charset="0"/>
+                <a:cs typeface="Courier New" panose="02070309020205020404" pitchFamily="49" charset="0"/>
+              </a:rPr>
+              <a:t> </a:t>
+            </a:r>
+            <a:r>
+              <a:rPr lang="nl-NL" sz="2200" i="1" dirty="0" err="1">
+                <a:latin typeface="Courier New" panose="02070309020205020404" pitchFamily="49" charset="0"/>
+                <a:cs typeface="Courier New" panose="02070309020205020404" pitchFamily="49" charset="0"/>
+              </a:rPr>
+              <a:t>dependencies</a:t>
+            </a:r>
+            <a:endParaRPr lang="nl-NL" sz="2200" dirty="0">
+              <a:latin typeface="Courier New" panose="02070309020205020404" pitchFamily="49" charset="0"/>
+              <a:cs typeface="Courier New" panose="02070309020205020404" pitchFamily="49" charset="0"/>
+            </a:endParaRPr>
+          </a:p>
+          <a:p>
+            <a:pPr marL="0" indent="0">
+              <a:buNone/>
+            </a:pPr>
+            <a:r>
+              <a:rPr lang="nl-NL" sz="2200" dirty="0">
+                <a:latin typeface="Courier New" panose="02070309020205020404" pitchFamily="49" charset="0"/>
+                <a:cs typeface="Courier New" panose="02070309020205020404" pitchFamily="49" charset="0"/>
+              </a:rPr>
+              <a:t>!pip </a:t>
+            </a:r>
+            <a:r>
+              <a:rPr lang="nl-NL" sz="2200" dirty="0" err="1">
+                <a:latin typeface="Courier New" panose="02070309020205020404" pitchFamily="49" charset="0"/>
+                <a:cs typeface="Courier New" panose="02070309020205020404" pitchFamily="49" charset="0"/>
+              </a:rPr>
+              <a:t>install</a:t>
+            </a:r>
+            <a:r>
+              <a:rPr lang="nl-NL" sz="2200" dirty="0">
+                <a:latin typeface="Courier New" panose="02070309020205020404" pitchFamily="49" charset="0"/>
+                <a:cs typeface="Courier New" panose="02070309020205020404" pitchFamily="49" charset="0"/>
+              </a:rPr>
+              <a:t> </a:t>
+            </a:r>
+            <a:r>
+              <a:rPr lang="nl-NL" sz="2200" dirty="0" err="1">
+                <a:latin typeface="Courier New" panose="02070309020205020404" pitchFamily="49" charset="0"/>
+                <a:cs typeface="Courier New" panose="02070309020205020404" pitchFamily="49" charset="0"/>
+              </a:rPr>
+              <a:t>git+https</a:t>
+            </a:r>
+            <a:r>
+              <a:rPr lang="nl-NL" sz="2200" dirty="0">
+                <a:latin typeface="Courier New" panose="02070309020205020404" pitchFamily="49" charset="0"/>
+                <a:cs typeface="Courier New" panose="02070309020205020404" pitchFamily="49" charset="0"/>
+              </a:rPr>
+              <a:t>://github.com/</a:t>
+            </a:r>
+            <a:r>
+              <a:rPr lang="nl-NL" sz="2200" dirty="0" err="1">
+                <a:latin typeface="Courier New" panose="02070309020205020404" pitchFamily="49" charset="0"/>
+                <a:cs typeface="Courier New" panose="02070309020205020404" pitchFamily="49" charset="0"/>
+              </a:rPr>
+              <a:t>UncertaintyInComplexSystems</a:t>
+            </a:r>
+            <a:r>
+              <a:rPr lang="nl-NL" sz="2200" dirty="0">
+                <a:latin typeface="Courier New" panose="02070309020205020404" pitchFamily="49" charset="0"/>
+                <a:cs typeface="Courier New" panose="02070309020205020404" pitchFamily="49" charset="0"/>
+              </a:rPr>
+              <a:t>/</a:t>
+            </a:r>
+            <a:r>
+              <a:rPr lang="nl-NL" sz="2200" dirty="0" err="1">
+                <a:latin typeface="Courier New" panose="02070309020205020404" pitchFamily="49" charset="0"/>
+                <a:cs typeface="Courier New" panose="02070309020205020404" pitchFamily="49" charset="0"/>
+              </a:rPr>
+              <a:t>bamojax</a:t>
+            </a:r>
+            <a:r>
+              <a:rPr lang="nl-NL" sz="2200" i="1" dirty="0" err="1">
+                <a:latin typeface="Courier New" panose="02070309020205020404" pitchFamily="49" charset="0"/>
+                <a:cs typeface="Courier New" panose="02070309020205020404" pitchFamily="49" charset="0"/>
+              </a:rPr>
+              <a:t>#egg</a:t>
+            </a:r>
+            <a:r>
+              <a:rPr lang="nl-NL" sz="2200" i="1" dirty="0">
+                <a:latin typeface="Courier New" panose="02070309020205020404" pitchFamily="49" charset="0"/>
+                <a:cs typeface="Courier New" panose="02070309020205020404" pitchFamily="49" charset="0"/>
+              </a:rPr>
+              <a:t>=</a:t>
+            </a:r>
+            <a:r>
+              <a:rPr lang="nl-NL" sz="2200" i="1" dirty="0" err="1">
+                <a:latin typeface="Courier New" panose="02070309020205020404" pitchFamily="49" charset="0"/>
+                <a:cs typeface="Courier New" panose="02070309020205020404" pitchFamily="49" charset="0"/>
+              </a:rPr>
+              <a:t>bamojax</a:t>
+            </a:r>
+            <a:r>
+              <a:rPr lang="nl-NL" sz="2200" i="1" dirty="0">
+                <a:latin typeface="Courier New" panose="02070309020205020404" pitchFamily="49" charset="0"/>
+                <a:cs typeface="Courier New" panose="02070309020205020404" pitchFamily="49" charset="0"/>
+              </a:rPr>
+              <a:t> --no-</a:t>
+            </a:r>
+            <a:r>
+              <a:rPr lang="nl-NL" sz="2200" i="1" dirty="0" err="1">
+                <a:latin typeface="Courier New" panose="02070309020205020404" pitchFamily="49" charset="0"/>
+                <a:cs typeface="Courier New" panose="02070309020205020404" pitchFamily="49" charset="0"/>
+              </a:rPr>
+              <a:t>deps</a:t>
+            </a:r>
+            <a:br>
+              <a:rPr lang="nl-NL" sz="2200" dirty="0">
+                <a:latin typeface="Courier New" panose="02070309020205020404" pitchFamily="49" charset="0"/>
+                <a:cs typeface="Courier New" panose="02070309020205020404" pitchFamily="49" charset="0"/>
+              </a:rPr>
+            </a:br>
+            <a:endParaRPr lang="nl-NL" sz="2200" dirty="0">
+              <a:latin typeface="Courier New" panose="02070309020205020404" pitchFamily="49" charset="0"/>
+              <a:cs typeface="Courier New" panose="02070309020205020404" pitchFamily="49" charset="0"/>
+            </a:endParaRPr>
+          </a:p>
+          <a:p>
+            <a:pPr marL="0" indent="0">
+              <a:buNone/>
+            </a:pPr>
+            <a:r>
+              <a:rPr lang="nl-NL" sz="2200" i="1" dirty="0">
+                <a:latin typeface="Courier New" panose="02070309020205020404" pitchFamily="49" charset="0"/>
+                <a:cs typeface="Courier New" panose="02070309020205020404" pitchFamily="49" charset="0"/>
+              </a:rPr>
+              <a:t># </a:t>
+            </a:r>
+            <a:r>
+              <a:rPr lang="nl-NL" sz="2200" i="1" dirty="0" err="1">
+                <a:latin typeface="Courier New" panose="02070309020205020404" pitchFamily="49" charset="0"/>
+                <a:cs typeface="Courier New" panose="02070309020205020404" pitchFamily="49" charset="0"/>
+              </a:rPr>
+              <a:t>Then</a:t>
+            </a:r>
+            <a:r>
+              <a:rPr lang="nl-NL" sz="2200" i="1" dirty="0">
+                <a:latin typeface="Courier New" panose="02070309020205020404" pitchFamily="49" charset="0"/>
+                <a:cs typeface="Courier New" panose="02070309020205020404" pitchFamily="49" charset="0"/>
+              </a:rPr>
+              <a:t> we </a:t>
+            </a:r>
+            <a:r>
+              <a:rPr lang="nl-NL" sz="2200" i="1" dirty="0" err="1">
+                <a:latin typeface="Courier New" panose="02070309020205020404" pitchFamily="49" charset="0"/>
+                <a:cs typeface="Courier New" panose="02070309020205020404" pitchFamily="49" charset="0"/>
+              </a:rPr>
+              <a:t>clone</a:t>
+            </a:r>
+            <a:r>
+              <a:rPr lang="nl-NL" sz="2200" i="1" dirty="0">
+                <a:latin typeface="Courier New" panose="02070309020205020404" pitchFamily="49" charset="0"/>
+                <a:cs typeface="Courier New" panose="02070309020205020404" pitchFamily="49" charset="0"/>
+              </a:rPr>
+              <a:t> </a:t>
+            </a:r>
+            <a:r>
+              <a:rPr lang="nl-NL" sz="2200" i="1" dirty="0" err="1">
+                <a:latin typeface="Courier New" panose="02070309020205020404" pitchFamily="49" charset="0"/>
+                <a:cs typeface="Courier New" panose="02070309020205020404" pitchFamily="49" charset="0"/>
+              </a:rPr>
+              <a:t>the</a:t>
+            </a:r>
+            <a:r>
+              <a:rPr lang="nl-NL" sz="2200" i="1" dirty="0">
+                <a:latin typeface="Courier New" panose="02070309020205020404" pitchFamily="49" charset="0"/>
+                <a:cs typeface="Courier New" panose="02070309020205020404" pitchFamily="49" charset="0"/>
+              </a:rPr>
+              <a:t> files </a:t>
+            </a:r>
+            <a:r>
+              <a:rPr lang="nl-NL" sz="2200" i="1" dirty="0" err="1">
+                <a:latin typeface="Courier New" panose="02070309020205020404" pitchFamily="49" charset="0"/>
+                <a:cs typeface="Courier New" panose="02070309020205020404" pitchFamily="49" charset="0"/>
+              </a:rPr>
+              <a:t>needed</a:t>
+            </a:r>
+            <a:r>
+              <a:rPr lang="nl-NL" sz="2200" i="1" dirty="0">
+                <a:latin typeface="Courier New" panose="02070309020205020404" pitchFamily="49" charset="0"/>
+                <a:cs typeface="Courier New" panose="02070309020205020404" pitchFamily="49" charset="0"/>
+              </a:rPr>
+              <a:t> </a:t>
+            </a:r>
+            <a:r>
+              <a:rPr lang="nl-NL" sz="2200" i="1" dirty="0" err="1">
+                <a:latin typeface="Courier New" panose="02070309020205020404" pitchFamily="49" charset="0"/>
+                <a:cs typeface="Courier New" panose="02070309020205020404" pitchFamily="49" charset="0"/>
+              </a:rPr>
+              <a:t>for</a:t>
+            </a:r>
+            <a:r>
+              <a:rPr lang="nl-NL" sz="2200" i="1" dirty="0">
+                <a:latin typeface="Courier New" panose="02070309020205020404" pitchFamily="49" charset="0"/>
+                <a:cs typeface="Courier New" panose="02070309020205020404" pitchFamily="49" charset="0"/>
+              </a:rPr>
+              <a:t> </a:t>
+            </a:r>
+            <a:r>
+              <a:rPr lang="nl-NL" sz="2200" i="1" dirty="0" err="1">
+                <a:latin typeface="Courier New" panose="02070309020205020404" pitchFamily="49" charset="0"/>
+                <a:cs typeface="Courier New" panose="02070309020205020404" pitchFamily="49" charset="0"/>
+              </a:rPr>
+              <a:t>the</a:t>
+            </a:r>
+            <a:r>
+              <a:rPr lang="nl-NL" sz="2200" i="1" dirty="0">
+                <a:latin typeface="Courier New" panose="02070309020205020404" pitchFamily="49" charset="0"/>
+                <a:cs typeface="Courier New" panose="02070309020205020404" pitchFamily="49" charset="0"/>
+              </a:rPr>
+              <a:t> workshop</a:t>
+            </a:r>
+            <a:endParaRPr lang="nl-NL" sz="2200" dirty="0">
+              <a:latin typeface="Courier New" panose="02070309020205020404" pitchFamily="49" charset="0"/>
+              <a:cs typeface="Courier New" panose="02070309020205020404" pitchFamily="49" charset="0"/>
+            </a:endParaRPr>
+          </a:p>
+          <a:p>
+            <a:pPr marL="0" indent="0">
+              <a:buNone/>
+            </a:pPr>
+            <a:r>
+              <a:rPr lang="nl-NL" sz="2200" dirty="0">
+                <a:latin typeface="Courier New" panose="02070309020205020404" pitchFamily="49" charset="0"/>
+                <a:cs typeface="Courier New" panose="02070309020205020404" pitchFamily="49" charset="0"/>
+              </a:rPr>
+              <a:t>!git </a:t>
+            </a:r>
+            <a:r>
+              <a:rPr lang="nl-NL" sz="2200" dirty="0" err="1">
+                <a:latin typeface="Courier New" panose="02070309020205020404" pitchFamily="49" charset="0"/>
+                <a:cs typeface="Courier New" panose="02070309020205020404" pitchFamily="49" charset="0"/>
+              </a:rPr>
+              <a:t>clone</a:t>
+            </a:r>
+            <a:r>
+              <a:rPr lang="nl-NL" sz="2200" dirty="0">
+                <a:latin typeface="Courier New" panose="02070309020205020404" pitchFamily="49" charset="0"/>
+                <a:cs typeface="Courier New" panose="02070309020205020404" pitchFamily="49" charset="0"/>
+              </a:rPr>
+              <a:t> https://github.com/UncertaintyInComplexSystems/BMA_Workshop.git</a:t>
+            </a:r>
+            <a:br>
+              <a:rPr lang="nl-NL" sz="2200" dirty="0">
+                <a:latin typeface="Courier New" panose="02070309020205020404" pitchFamily="49" charset="0"/>
+                <a:cs typeface="Courier New" panose="02070309020205020404" pitchFamily="49" charset="0"/>
+              </a:rPr>
+            </a:br>
+            <a:endParaRPr lang="nl-NL" sz="2200" dirty="0">
+              <a:latin typeface="Courier New" panose="02070309020205020404" pitchFamily="49" charset="0"/>
+              <a:cs typeface="Courier New" panose="02070309020205020404" pitchFamily="49" charset="0"/>
+            </a:endParaRPr>
+          </a:p>
+          <a:p>
+            <a:pPr marL="0" indent="0">
+              <a:buNone/>
+            </a:pPr>
+            <a:r>
+              <a:rPr lang="nl-NL" sz="2200" dirty="0">
+                <a:latin typeface="Courier New" panose="02070309020205020404" pitchFamily="49" charset="0"/>
+                <a:cs typeface="Courier New" panose="02070309020205020404" pitchFamily="49" charset="0"/>
+              </a:rPr>
+              <a:t>import </a:t>
+            </a:r>
+            <a:r>
+              <a:rPr lang="nl-NL" sz="2200" dirty="0" err="1">
+                <a:latin typeface="Courier New" panose="02070309020205020404" pitchFamily="49" charset="0"/>
+                <a:cs typeface="Courier New" panose="02070309020205020404" pitchFamily="49" charset="0"/>
+              </a:rPr>
+              <a:t>sys</a:t>
+            </a:r>
+            <a:endParaRPr lang="nl-NL" sz="2200" dirty="0">
+              <a:latin typeface="Courier New" panose="02070309020205020404" pitchFamily="49" charset="0"/>
+              <a:cs typeface="Courier New" panose="02070309020205020404" pitchFamily="49" charset="0"/>
+            </a:endParaRPr>
+          </a:p>
+          <a:p>
+            <a:pPr marL="0" indent="0">
+              <a:buNone/>
+            </a:pPr>
+            <a:r>
+              <a:rPr lang="nl-NL" sz="2200" dirty="0" err="1">
+                <a:latin typeface="Courier New" panose="02070309020205020404" pitchFamily="49" charset="0"/>
+                <a:cs typeface="Courier New" panose="02070309020205020404" pitchFamily="49" charset="0"/>
+              </a:rPr>
+              <a:t>sys.path.append</a:t>
+            </a:r>
+            <a:r>
+              <a:rPr lang="nl-NL" sz="2200" dirty="0">
+                <a:latin typeface="Courier New" panose="02070309020205020404" pitchFamily="49" charset="0"/>
+                <a:cs typeface="Courier New" panose="02070309020205020404" pitchFamily="49" charset="0"/>
+              </a:rPr>
+              <a:t>("/content/</a:t>
+            </a:r>
+            <a:r>
+              <a:rPr lang="nl-NL" sz="2200" dirty="0" err="1">
+                <a:latin typeface="Courier New" panose="02070309020205020404" pitchFamily="49" charset="0"/>
+                <a:cs typeface="Courier New" panose="02070309020205020404" pitchFamily="49" charset="0"/>
+              </a:rPr>
+              <a:t>BMA_Workshop</a:t>
+            </a:r>
+            <a:r>
+              <a:rPr lang="nl-NL" sz="2200" dirty="0">
+                <a:latin typeface="Courier New" panose="02070309020205020404" pitchFamily="49" charset="0"/>
+                <a:cs typeface="Courier New" panose="02070309020205020404" pitchFamily="49" charset="0"/>
+              </a:rPr>
+              <a:t>")</a:t>
+            </a:r>
+            <a:br>
+              <a:rPr lang="nl-NL" sz="2200" dirty="0">
+                <a:latin typeface="Courier New" panose="02070309020205020404" pitchFamily="49" charset="0"/>
+                <a:cs typeface="Courier New" panose="02070309020205020404" pitchFamily="49" charset="0"/>
+              </a:rPr>
+            </a:br>
+            <a:endParaRPr lang="nl-NL" sz="2200" dirty="0">
+              <a:latin typeface="Courier New" panose="02070309020205020404" pitchFamily="49" charset="0"/>
+              <a:cs typeface="Courier New" panose="02070309020205020404" pitchFamily="49" charset="0"/>
+            </a:endParaRPr>
+          </a:p>
+          <a:p>
+            <a:pPr marL="0" indent="0">
+              <a:buNone/>
+            </a:pPr>
+            <a:r>
+              <a:rPr lang="nl-NL" sz="2200" i="1" dirty="0">
+                <a:latin typeface="Courier New" panose="02070309020205020404" pitchFamily="49" charset="0"/>
+                <a:cs typeface="Courier New" panose="02070309020205020404" pitchFamily="49" charset="0"/>
+              </a:rPr>
+              <a:t># </a:t>
+            </a:r>
+            <a:r>
+              <a:rPr lang="nl-NL" sz="2200" i="1" dirty="0" err="1">
+                <a:latin typeface="Courier New" panose="02070309020205020404" pitchFamily="49" charset="0"/>
+                <a:cs typeface="Courier New" panose="02070309020205020404" pitchFamily="49" charset="0"/>
+              </a:rPr>
+              <a:t>And</a:t>
+            </a:r>
+            <a:r>
+              <a:rPr lang="nl-NL" sz="2200" i="1" dirty="0">
+                <a:latin typeface="Courier New" panose="02070309020205020404" pitchFamily="49" charset="0"/>
+                <a:cs typeface="Courier New" panose="02070309020205020404" pitchFamily="49" charset="0"/>
+              </a:rPr>
+              <a:t> </a:t>
+            </a:r>
+            <a:r>
+              <a:rPr lang="nl-NL" sz="2200" i="1" dirty="0" err="1">
+                <a:latin typeface="Courier New" panose="02070309020205020404" pitchFamily="49" charset="0"/>
+                <a:cs typeface="Courier New" panose="02070309020205020404" pitchFamily="49" charset="0"/>
+              </a:rPr>
+              <a:t>ensure</a:t>
+            </a:r>
+            <a:r>
+              <a:rPr lang="nl-NL" sz="2200" i="1" dirty="0">
+                <a:latin typeface="Courier New" panose="02070309020205020404" pitchFamily="49" charset="0"/>
+                <a:cs typeface="Courier New" panose="02070309020205020404" pitchFamily="49" charset="0"/>
+              </a:rPr>
+              <a:t> we </a:t>
+            </a:r>
+            <a:r>
+              <a:rPr lang="nl-NL" sz="2200" i="1" dirty="0" err="1">
+                <a:latin typeface="Courier New" panose="02070309020205020404" pitchFamily="49" charset="0"/>
+                <a:cs typeface="Courier New" panose="02070309020205020404" pitchFamily="49" charset="0"/>
+              </a:rPr>
+              <a:t>can</a:t>
+            </a:r>
+            <a:r>
+              <a:rPr lang="nl-NL" sz="2200" i="1" dirty="0">
+                <a:latin typeface="Courier New" panose="02070309020205020404" pitchFamily="49" charset="0"/>
+                <a:cs typeface="Courier New" panose="02070309020205020404" pitchFamily="49" charset="0"/>
+              </a:rPr>
+              <a:t> load </a:t>
+            </a:r>
+            <a:r>
+              <a:rPr lang="nl-NL" sz="2200" i="1" dirty="0" err="1">
+                <a:latin typeface="Courier New" panose="02070309020205020404" pitchFamily="49" charset="0"/>
+                <a:cs typeface="Courier New" panose="02070309020205020404" pitchFamily="49" charset="0"/>
+              </a:rPr>
+              <a:t>the</a:t>
+            </a:r>
+            <a:r>
+              <a:rPr lang="nl-NL" sz="2200" i="1" dirty="0">
+                <a:latin typeface="Courier New" panose="02070309020205020404" pitchFamily="49" charset="0"/>
+                <a:cs typeface="Courier New" panose="02070309020205020404" pitchFamily="49" charset="0"/>
+              </a:rPr>
+              <a:t> data files</a:t>
+            </a:r>
+            <a:endParaRPr lang="nl-NL" sz="2200" dirty="0">
+              <a:latin typeface="Courier New" panose="02070309020205020404" pitchFamily="49" charset="0"/>
+              <a:cs typeface="Courier New" panose="02070309020205020404" pitchFamily="49" charset="0"/>
+            </a:endParaRPr>
+          </a:p>
+          <a:p>
+            <a:pPr marL="0" indent="0">
+              <a:buNone/>
+            </a:pPr>
+            <a:r>
+              <a:rPr lang="nl-NL" sz="2200" dirty="0">
+                <a:latin typeface="Courier New" panose="02070309020205020404" pitchFamily="49" charset="0"/>
+                <a:cs typeface="Courier New" panose="02070309020205020404" pitchFamily="49" charset="0"/>
+              </a:rPr>
+              <a:t>%cd /content/</a:t>
+            </a:r>
+            <a:r>
+              <a:rPr lang="nl-NL" sz="2200" dirty="0" err="1">
+                <a:latin typeface="Courier New" panose="02070309020205020404" pitchFamily="49" charset="0"/>
+                <a:cs typeface="Courier New" panose="02070309020205020404" pitchFamily="49" charset="0"/>
+              </a:rPr>
+              <a:t>BMA_Workshop</a:t>
+            </a:r>
+            <a:endParaRPr lang="nl-NL" sz="1400" dirty="0">
+              <a:latin typeface="Courier New" panose="02070309020205020404" pitchFamily="49" charset="0"/>
+              <a:cs typeface="Courier New" panose="02070309020205020404" pitchFamily="49" charset="0"/>
+            </a:endParaRPr>
+          </a:p>
+          <a:p>
+            <a:endParaRPr lang="nl-NL" sz="1800" dirty="0"/>
           </a:p>
         </p:txBody>
       </p:sp>
@@ -11200,7 +12463,981 @@
 </p:sld>
 </file>
 
-<file path=ppt/slides/slide22.xml><?xml version="1.0" encoding="utf-8"?>
+<file path=ppt/slides/slide24.xml><?xml version="1.0" encoding="utf-8"?>
+<p:sld xmlns:a="http://schemas.openxmlformats.org/drawingml/2006/main" xmlns:r="http://schemas.openxmlformats.org/officeDocument/2006/relationships" xmlns:p="http://schemas.openxmlformats.org/presentationml/2006/main">
+  <p:cSld>
+    <p:spTree>
+      <p:nvGrpSpPr>
+        <p:cNvPr id="1" name="">
+          <a:extLst>
+            <a:ext uri="{FF2B5EF4-FFF2-40B4-BE49-F238E27FC236}">
+              <a16:creationId xmlns:a16="http://schemas.microsoft.com/office/drawing/2014/main" id="{42023474-B12D-C50D-DE4B-FE37669C47DE}"/>
+            </a:ext>
+          </a:extLst>
+        </p:cNvPr>
+        <p:cNvGrpSpPr/>
+        <p:nvPr/>
+      </p:nvGrpSpPr>
+      <p:grpSpPr>
+        <a:xfrm>
+          <a:off x="0" y="0"/>
+          <a:ext cx="0" cy="0"/>
+          <a:chOff x="0" y="0"/>
+          <a:chExt cx="0" cy="0"/>
+        </a:xfrm>
+      </p:grpSpPr>
+      <p:sp>
+        <p:nvSpPr>
+          <p:cNvPr id="2" name="Titel 1">
+            <a:extLst>
+              <a:ext uri="{FF2B5EF4-FFF2-40B4-BE49-F238E27FC236}">
+                <a16:creationId xmlns:a16="http://schemas.microsoft.com/office/drawing/2014/main" id="{DE2C41F7-03E6-741B-E554-EB3E4904F1BB}"/>
+              </a:ext>
+            </a:extLst>
+          </p:cNvPr>
+          <p:cNvSpPr>
+            <a:spLocks noGrp="1"/>
+          </p:cNvSpPr>
+          <p:nvPr>
+            <p:ph type="title"/>
+          </p:nvPr>
+        </p:nvSpPr>
+        <p:spPr/>
+        <p:txBody>
+          <a:bodyPr/>
+          <a:lstStyle/>
+          <a:p>
+            <a:r>
+              <a:rPr lang="nl-NL" dirty="0" err="1"/>
+              <a:t>Structure</a:t>
+            </a:r>
+            <a:r>
+              <a:rPr lang="nl-NL" dirty="0"/>
+              <a:t> </a:t>
+            </a:r>
+            <a:r>
+              <a:rPr lang="nl-NL" dirty="0" err="1"/>
+              <a:t>and</a:t>
+            </a:r>
+            <a:r>
+              <a:rPr lang="nl-NL" dirty="0"/>
+              <a:t> goals of </a:t>
+            </a:r>
+            <a:r>
+              <a:rPr lang="nl-NL" dirty="0" err="1"/>
+              <a:t>tutorials</a:t>
+            </a:r>
+            <a:endParaRPr lang="nl-NL" dirty="0"/>
+          </a:p>
+        </p:txBody>
+      </p:sp>
+      <p:sp>
+        <p:nvSpPr>
+          <p:cNvPr id="3" name="Tijdelijke aanduiding voor inhoud 2">
+            <a:extLst>
+              <a:ext uri="{FF2B5EF4-FFF2-40B4-BE49-F238E27FC236}">
+                <a16:creationId xmlns:a16="http://schemas.microsoft.com/office/drawing/2014/main" id="{ACD134C6-955A-953C-33C5-484D47129937}"/>
+              </a:ext>
+            </a:extLst>
+          </p:cNvPr>
+          <p:cNvSpPr>
+            <a:spLocks noGrp="1"/>
+          </p:cNvSpPr>
+          <p:nvPr>
+            <p:ph idx="1"/>
+          </p:nvPr>
+        </p:nvSpPr>
+        <p:spPr>
+          <a:xfrm>
+            <a:off x="838200" y="1825624"/>
+            <a:ext cx="10381090" cy="4667251"/>
+          </a:xfrm>
+        </p:spPr>
+        <p:txBody>
+          <a:bodyPr>
+            <a:normAutofit/>
+          </a:bodyPr>
+          <a:lstStyle/>
+          <a:p>
+            <a:r>
+              <a:rPr lang="nl-NL" sz="2000" dirty="0"/>
+              <a:t>Tutorial 0: </a:t>
+            </a:r>
+          </a:p>
+          <a:p>
+            <a:pPr lvl="1"/>
+            <a:r>
+              <a:rPr lang="nl-NL" sz="1600" dirty="0"/>
+              <a:t>Using JAX </a:t>
+            </a:r>
+            <a:r>
+              <a:rPr lang="nl-NL" sz="1600" dirty="0" err="1"/>
+              <a:t>primitives</a:t>
+            </a:r>
+            <a:r>
+              <a:rPr lang="nl-NL" sz="1600" dirty="0"/>
+              <a:t> </a:t>
+            </a:r>
+            <a:r>
+              <a:rPr lang="nl-NL" sz="1600" dirty="0" err="1"/>
+              <a:t>to</a:t>
+            </a:r>
+            <a:r>
+              <a:rPr lang="nl-NL" sz="1600" dirty="0"/>
+              <a:t> </a:t>
+            </a:r>
+            <a:r>
+              <a:rPr lang="nl-NL" sz="1600" dirty="0" err="1"/>
+              <a:t>replace</a:t>
+            </a:r>
+            <a:r>
+              <a:rPr lang="nl-NL" sz="1600" dirty="0"/>
+              <a:t> </a:t>
+            </a:r>
+            <a:r>
+              <a:rPr lang="nl-NL" sz="1600" dirty="0" err="1"/>
+              <a:t>for</a:t>
+            </a:r>
+            <a:r>
+              <a:rPr lang="nl-NL" sz="1600" dirty="0"/>
+              <a:t>-loops.</a:t>
+            </a:r>
+          </a:p>
+          <a:p>
+            <a:pPr lvl="1"/>
+            <a:r>
+              <a:rPr lang="nl-NL" sz="1600" dirty="0"/>
+              <a:t>Using JAX </a:t>
+            </a:r>
+            <a:r>
+              <a:rPr lang="nl-NL" sz="1600" dirty="0" err="1"/>
+              <a:t>keys</a:t>
+            </a:r>
+            <a:r>
+              <a:rPr lang="nl-NL" sz="1600" dirty="0"/>
+              <a:t> </a:t>
+            </a:r>
+            <a:r>
+              <a:rPr lang="nl-NL" sz="1600" dirty="0" err="1"/>
+              <a:t>instead</a:t>
+            </a:r>
+            <a:r>
+              <a:rPr lang="nl-NL" sz="1600" dirty="0"/>
+              <a:t> of </a:t>
+            </a:r>
+            <a:r>
+              <a:rPr lang="nl-NL" sz="1600" dirty="0" err="1"/>
+              <a:t>global</a:t>
+            </a:r>
+            <a:r>
+              <a:rPr lang="nl-NL" sz="1600" dirty="0"/>
+              <a:t> random </a:t>
+            </a:r>
+            <a:r>
+              <a:rPr lang="nl-NL" sz="1600" dirty="0" err="1"/>
+              <a:t>seeds</a:t>
+            </a:r>
+            <a:r>
+              <a:rPr lang="nl-NL" sz="1600" dirty="0"/>
+              <a:t>.</a:t>
+            </a:r>
+          </a:p>
+          <a:p>
+            <a:pPr lvl="1"/>
+            <a:r>
+              <a:rPr lang="nl-NL" sz="1600" dirty="0" err="1"/>
+              <a:t>Estimate</a:t>
+            </a:r>
+            <a:r>
+              <a:rPr lang="nl-NL" sz="1600" dirty="0"/>
+              <a:t> a </a:t>
+            </a:r>
+            <a:r>
+              <a:rPr lang="nl-NL" sz="1600" dirty="0" err="1"/>
+              <a:t>marginal</a:t>
+            </a:r>
+            <a:r>
+              <a:rPr lang="nl-NL" sz="1600" dirty="0"/>
+              <a:t> </a:t>
+            </a:r>
+            <a:r>
+              <a:rPr lang="nl-NL" sz="1600" dirty="0" err="1"/>
+              <a:t>likelihood</a:t>
+            </a:r>
+            <a:r>
+              <a:rPr lang="nl-NL" sz="1600" dirty="0"/>
+              <a:t> </a:t>
+            </a:r>
+            <a:r>
+              <a:rPr lang="nl-NL" sz="1600" dirty="0" err="1"/>
+              <a:t>using</a:t>
+            </a:r>
+            <a:r>
+              <a:rPr lang="nl-NL" sz="1600" dirty="0"/>
+              <a:t> </a:t>
+            </a:r>
+            <a:r>
+              <a:rPr lang="nl-NL" sz="1600" dirty="0" err="1"/>
+              <a:t>Naive</a:t>
+            </a:r>
+            <a:r>
+              <a:rPr lang="nl-NL" sz="1600" dirty="0"/>
+              <a:t> Monte Carlo.</a:t>
+            </a:r>
+          </a:p>
+          <a:p>
+            <a:r>
+              <a:rPr lang="nl-NL" sz="2000" dirty="0"/>
+              <a:t>Tutorial 1:</a:t>
+            </a:r>
+          </a:p>
+          <a:p>
+            <a:pPr lvl="1"/>
+            <a:r>
+              <a:rPr lang="nl-NL" sz="1600" dirty="0" err="1"/>
+              <a:t>Compare</a:t>
+            </a:r>
+            <a:r>
+              <a:rPr lang="nl-NL" sz="1600" dirty="0"/>
+              <a:t> 3 </a:t>
+            </a:r>
+            <a:r>
+              <a:rPr lang="nl-NL" sz="1600" dirty="0" err="1"/>
+              <a:t>models</a:t>
+            </a:r>
+            <a:r>
+              <a:rPr lang="nl-NL" sz="1600" dirty="0"/>
+              <a:t> </a:t>
+            </a:r>
+            <a:r>
+              <a:rPr lang="nl-NL" sz="1600" dirty="0" err="1"/>
+              <a:t>for</a:t>
+            </a:r>
+            <a:r>
+              <a:rPr lang="nl-NL" sz="1600" dirty="0"/>
+              <a:t> discrete </a:t>
+            </a:r>
+            <a:r>
+              <a:rPr lang="nl-NL" sz="1600" dirty="0" err="1"/>
+              <a:t>count</a:t>
+            </a:r>
+            <a:r>
+              <a:rPr lang="nl-NL" sz="1600" dirty="0"/>
+              <a:t> data.</a:t>
+            </a:r>
+          </a:p>
+          <a:p>
+            <a:pPr lvl="1"/>
+            <a:r>
+              <a:rPr lang="nl-NL" sz="1600" dirty="0" err="1"/>
+              <a:t>Estimate</a:t>
+            </a:r>
+            <a:r>
+              <a:rPr lang="nl-NL" sz="1600" dirty="0"/>
+              <a:t> </a:t>
+            </a:r>
+            <a:r>
+              <a:rPr lang="nl-NL" sz="1600" dirty="0" err="1"/>
+              <a:t>marginal</a:t>
+            </a:r>
+            <a:r>
+              <a:rPr lang="nl-NL" sz="1600" dirty="0"/>
+              <a:t> </a:t>
+            </a:r>
+            <a:r>
+              <a:rPr lang="nl-NL" sz="1600" dirty="0" err="1"/>
+              <a:t>likelihoods</a:t>
+            </a:r>
+            <a:r>
+              <a:rPr lang="nl-NL" sz="1600" dirty="0"/>
+              <a:t> </a:t>
+            </a:r>
+            <a:r>
+              <a:rPr lang="nl-NL" sz="1600" dirty="0" err="1"/>
+              <a:t>with</a:t>
+            </a:r>
+            <a:r>
+              <a:rPr lang="nl-NL" sz="1600" dirty="0"/>
+              <a:t> </a:t>
+            </a:r>
+            <a:r>
+              <a:rPr lang="nl-NL" sz="1600" dirty="0" err="1"/>
+              <a:t>bamojax</a:t>
+            </a:r>
+            <a:r>
+              <a:rPr lang="nl-NL" sz="1600" dirty="0"/>
+              <a:t> tools.</a:t>
+            </a:r>
+          </a:p>
+          <a:p>
+            <a:pPr lvl="1"/>
+            <a:r>
+              <a:rPr lang="nl-NL" sz="1600" dirty="0" err="1"/>
+              <a:t>Transform</a:t>
+            </a:r>
+            <a:r>
+              <a:rPr lang="nl-NL" sz="1600" dirty="0"/>
+              <a:t> </a:t>
+            </a:r>
+            <a:r>
+              <a:rPr lang="nl-NL" sz="1600" dirty="0" err="1"/>
+              <a:t>marginal</a:t>
+            </a:r>
+            <a:r>
+              <a:rPr lang="nl-NL" sz="1600" dirty="0"/>
+              <a:t> </a:t>
+            </a:r>
+            <a:r>
+              <a:rPr lang="nl-NL" sz="1600" dirty="0" err="1"/>
+              <a:t>likelihoods</a:t>
+            </a:r>
+            <a:r>
+              <a:rPr lang="nl-NL" sz="1600" dirty="0"/>
+              <a:t> </a:t>
+            </a:r>
+            <a:r>
+              <a:rPr lang="nl-NL" sz="1600" dirty="0" err="1"/>
+              <a:t>to</a:t>
+            </a:r>
+            <a:r>
+              <a:rPr lang="nl-NL" sz="1600" dirty="0"/>
+              <a:t> posterior model </a:t>
+            </a:r>
+            <a:r>
+              <a:rPr lang="nl-NL" sz="1600" dirty="0" err="1"/>
+              <a:t>probabilities</a:t>
+            </a:r>
+            <a:r>
+              <a:rPr lang="nl-NL" sz="1600" dirty="0"/>
+              <a:t>.</a:t>
+            </a:r>
+          </a:p>
+          <a:p>
+            <a:pPr lvl="1"/>
+            <a:r>
+              <a:rPr lang="nl-NL" sz="1600" dirty="0" err="1"/>
+              <a:t>Compute</a:t>
+            </a:r>
+            <a:r>
+              <a:rPr lang="nl-NL" sz="1600" dirty="0"/>
+              <a:t> model </a:t>
+            </a:r>
+            <a:r>
+              <a:rPr lang="nl-NL" sz="1600" dirty="0" err="1"/>
+              <a:t>averages</a:t>
+            </a:r>
+            <a:r>
+              <a:rPr lang="nl-NL" sz="1600" dirty="0"/>
+              <a:t>.</a:t>
+            </a:r>
+          </a:p>
+          <a:p>
+            <a:r>
+              <a:rPr lang="nl-NL" sz="2000" dirty="0"/>
+              <a:t>Tutorial 2:</a:t>
+            </a:r>
+          </a:p>
+          <a:p>
+            <a:pPr lvl="1"/>
+            <a:r>
+              <a:rPr lang="nl-NL" sz="1600" dirty="0" err="1"/>
+              <a:t>Replicate</a:t>
+            </a:r>
+            <a:r>
+              <a:rPr lang="nl-NL" sz="1600" dirty="0"/>
+              <a:t> BMA </a:t>
+            </a:r>
+            <a:r>
+              <a:rPr lang="nl-NL" sz="1600" dirty="0" err="1"/>
+              <a:t>study</a:t>
+            </a:r>
+            <a:r>
+              <a:rPr lang="nl-NL" sz="1600" dirty="0"/>
+              <a:t> </a:t>
+            </a:r>
+            <a:r>
+              <a:rPr lang="nl-NL" sz="1600" dirty="0" err="1"/>
+              <a:t>by</a:t>
+            </a:r>
+            <a:r>
+              <a:rPr lang="nl-NL" sz="1600" dirty="0"/>
+              <a:t> Moiseenko et al.</a:t>
+            </a:r>
+          </a:p>
+          <a:p>
+            <a:pPr lvl="1"/>
+            <a:r>
+              <a:rPr lang="nl-NL" sz="1600" dirty="0" err="1"/>
+              <a:t>Approximate</a:t>
+            </a:r>
+            <a:r>
+              <a:rPr lang="nl-NL" sz="1600" dirty="0"/>
+              <a:t> posterior </a:t>
+            </a:r>
+            <a:r>
+              <a:rPr lang="nl-NL" sz="1600" dirty="0" err="1"/>
+              <a:t>and</a:t>
+            </a:r>
+            <a:r>
+              <a:rPr lang="nl-NL" sz="1600" dirty="0"/>
+              <a:t> </a:t>
+            </a:r>
+            <a:r>
+              <a:rPr lang="nl-NL" sz="1600" dirty="0" err="1"/>
+              <a:t>estimate</a:t>
+            </a:r>
+            <a:r>
+              <a:rPr lang="nl-NL" sz="1600" dirty="0"/>
+              <a:t> </a:t>
+            </a:r>
+            <a:r>
+              <a:rPr lang="nl-NL" sz="1600" dirty="0" err="1"/>
+              <a:t>marginal</a:t>
+            </a:r>
+            <a:r>
+              <a:rPr lang="nl-NL" sz="1600" dirty="0"/>
+              <a:t> </a:t>
+            </a:r>
+            <a:r>
+              <a:rPr lang="nl-NL" sz="1600" dirty="0" err="1"/>
+              <a:t>likelihoods</a:t>
+            </a:r>
+            <a:r>
+              <a:rPr lang="nl-NL" sz="1600" dirty="0"/>
+              <a:t>.</a:t>
+            </a:r>
+          </a:p>
+          <a:p>
+            <a:pPr lvl="1"/>
+            <a:r>
+              <a:rPr lang="nl-NL" sz="1600" dirty="0" err="1"/>
+              <a:t>Compute</a:t>
+            </a:r>
+            <a:r>
+              <a:rPr lang="nl-NL" sz="1600" dirty="0"/>
+              <a:t> Bayes factors </a:t>
+            </a:r>
+            <a:r>
+              <a:rPr lang="nl-NL" sz="1600" dirty="0" err="1"/>
+              <a:t>and</a:t>
+            </a:r>
+            <a:r>
+              <a:rPr lang="nl-NL" sz="1600" dirty="0"/>
+              <a:t> </a:t>
+            </a:r>
+            <a:r>
+              <a:rPr lang="nl-NL" sz="1600" dirty="0" err="1"/>
+              <a:t>inclusion</a:t>
+            </a:r>
+            <a:r>
+              <a:rPr lang="nl-NL" sz="1600" dirty="0"/>
+              <a:t> </a:t>
+            </a:r>
+            <a:r>
+              <a:rPr lang="nl-NL" sz="1600" dirty="0" err="1"/>
+              <a:t>probabilities</a:t>
+            </a:r>
+            <a:r>
+              <a:rPr lang="nl-NL" sz="1600" dirty="0"/>
+              <a:t>.</a:t>
+            </a:r>
+          </a:p>
+          <a:p>
+            <a:pPr lvl="1"/>
+            <a:r>
+              <a:rPr lang="nl-NL" sz="1600" dirty="0" err="1"/>
+              <a:t>Observe</a:t>
+            </a:r>
+            <a:r>
+              <a:rPr lang="nl-NL" sz="1600" dirty="0"/>
+              <a:t> non-</a:t>
+            </a:r>
+            <a:r>
+              <a:rPr lang="nl-NL" sz="1600" dirty="0" err="1"/>
+              <a:t>Gaussian</a:t>
+            </a:r>
+            <a:r>
+              <a:rPr lang="nl-NL" sz="1600" dirty="0"/>
+              <a:t> model </a:t>
+            </a:r>
+            <a:r>
+              <a:rPr lang="nl-NL" sz="1600" dirty="0" err="1"/>
+              <a:t>averages</a:t>
+            </a:r>
+            <a:r>
+              <a:rPr lang="nl-NL" sz="1600" dirty="0"/>
+              <a:t>.</a:t>
+            </a:r>
+          </a:p>
+        </p:txBody>
+      </p:sp>
+    </p:spTree>
+    <p:extLst>
+      <p:ext uri="{BB962C8B-B14F-4D97-AF65-F5344CB8AC3E}">
+        <p14:creationId xmlns:p14="http://schemas.microsoft.com/office/powerpoint/2010/main" val="1399830714"/>
+      </p:ext>
+    </p:extLst>
+  </p:cSld>
+  <p:clrMapOvr>
+    <a:masterClrMapping/>
+  </p:clrMapOvr>
+</p:sld>
+</file>
+
+<file path=ppt/slides/slide25.xml><?xml version="1.0" encoding="utf-8"?>
+<p:sld xmlns:a="http://schemas.openxmlformats.org/drawingml/2006/main" xmlns:r="http://schemas.openxmlformats.org/officeDocument/2006/relationships" xmlns:p="http://schemas.openxmlformats.org/presentationml/2006/main">
+  <p:cSld>
+    <p:spTree>
+      <p:nvGrpSpPr>
+        <p:cNvPr id="1" name="">
+          <a:extLst>
+            <a:ext uri="{FF2B5EF4-FFF2-40B4-BE49-F238E27FC236}">
+              <a16:creationId xmlns:a16="http://schemas.microsoft.com/office/drawing/2014/main" id="{05BAF90B-F967-AEFE-8039-6D449B03FA1D}"/>
+            </a:ext>
+          </a:extLst>
+        </p:cNvPr>
+        <p:cNvGrpSpPr/>
+        <p:nvPr/>
+      </p:nvGrpSpPr>
+      <p:grpSpPr>
+        <a:xfrm>
+          <a:off x="0" y="0"/>
+          <a:ext cx="0" cy="0"/>
+          <a:chOff x="0" y="0"/>
+          <a:chExt cx="0" cy="0"/>
+        </a:xfrm>
+      </p:grpSpPr>
+      <p:sp>
+        <p:nvSpPr>
+          <p:cNvPr id="2" name="Titel 1">
+            <a:extLst>
+              <a:ext uri="{FF2B5EF4-FFF2-40B4-BE49-F238E27FC236}">
+                <a16:creationId xmlns:a16="http://schemas.microsoft.com/office/drawing/2014/main" id="{2EA20439-F136-63E8-4921-41374E4A279D}"/>
+              </a:ext>
+            </a:extLst>
+          </p:cNvPr>
+          <p:cNvSpPr>
+            <a:spLocks noGrp="1"/>
+          </p:cNvSpPr>
+          <p:nvPr>
+            <p:ph type="title"/>
+          </p:nvPr>
+        </p:nvSpPr>
+        <p:spPr/>
+        <p:txBody>
+          <a:bodyPr/>
+          <a:lstStyle/>
+          <a:p>
+            <a:r>
+              <a:rPr lang="nl-NL" dirty="0" err="1"/>
+              <a:t>Stuck</a:t>
+            </a:r>
+            <a:r>
+              <a:rPr lang="nl-NL" dirty="0"/>
+              <a:t>?</a:t>
+            </a:r>
+          </a:p>
+        </p:txBody>
+      </p:sp>
+      <p:sp>
+        <p:nvSpPr>
+          <p:cNvPr id="3" name="Tijdelijke aanduiding voor inhoud 2">
+            <a:extLst>
+              <a:ext uri="{FF2B5EF4-FFF2-40B4-BE49-F238E27FC236}">
+                <a16:creationId xmlns:a16="http://schemas.microsoft.com/office/drawing/2014/main" id="{51213644-9C8A-369F-44CA-55DEACF53D85}"/>
+              </a:ext>
+            </a:extLst>
+          </p:cNvPr>
+          <p:cNvSpPr>
+            <a:spLocks noGrp="1"/>
+          </p:cNvSpPr>
+          <p:nvPr>
+            <p:ph idx="1"/>
+          </p:nvPr>
+        </p:nvSpPr>
+        <p:spPr>
+          <a:xfrm>
+            <a:off x="838200" y="1825624"/>
+            <a:ext cx="10381090" cy="4667251"/>
+          </a:xfrm>
+        </p:spPr>
+        <p:txBody>
+          <a:bodyPr>
+            <a:normAutofit/>
+          </a:bodyPr>
+          <a:lstStyle/>
+          <a:p>
+            <a:r>
+              <a:rPr lang="nl-NL" sz="2000" dirty="0" err="1"/>
+              <a:t>Please</a:t>
+            </a:r>
+            <a:r>
+              <a:rPr lang="nl-NL" sz="2000" dirty="0"/>
+              <a:t> </a:t>
+            </a:r>
+            <a:r>
+              <a:rPr lang="nl-NL" sz="2000" dirty="0" err="1"/>
+              <a:t>ask</a:t>
+            </a:r>
+            <a:r>
+              <a:rPr lang="nl-NL" sz="2000" dirty="0"/>
+              <a:t>!</a:t>
+            </a:r>
+          </a:p>
+          <a:p>
+            <a:endParaRPr lang="nl-NL" sz="2000" dirty="0"/>
+          </a:p>
+          <a:p>
+            <a:r>
+              <a:rPr lang="nl-NL" sz="2000" dirty="0"/>
+              <a:t>For </a:t>
+            </a:r>
+            <a:r>
+              <a:rPr lang="nl-NL" sz="2000" dirty="0" err="1"/>
+              <a:t>each</a:t>
+            </a:r>
+            <a:r>
+              <a:rPr lang="nl-NL" sz="2000" dirty="0"/>
+              <a:t> tutorial, </a:t>
+            </a:r>
+            <a:r>
+              <a:rPr lang="nl-NL" sz="2000" dirty="0" err="1"/>
+              <a:t>there</a:t>
+            </a:r>
+            <a:r>
+              <a:rPr lang="nl-NL" sz="2000" dirty="0"/>
+              <a:t> is a ‘</a:t>
+            </a:r>
+            <a:r>
+              <a:rPr lang="nl-NL" sz="2000" dirty="0" err="1"/>
+              <a:t>teacher’s</a:t>
+            </a:r>
+            <a:r>
+              <a:rPr lang="nl-NL" sz="2000" dirty="0"/>
+              <a:t> copy’ </a:t>
+            </a:r>
+            <a:r>
+              <a:rPr lang="nl-NL" sz="2000" dirty="0" err="1"/>
+              <a:t>version</a:t>
+            </a:r>
+            <a:r>
+              <a:rPr lang="nl-NL" sz="2000" dirty="0"/>
+              <a:t>. </a:t>
+            </a:r>
+            <a:r>
+              <a:rPr lang="nl-NL" sz="2000" dirty="0" err="1"/>
+              <a:t>This</a:t>
+            </a:r>
+            <a:r>
+              <a:rPr lang="nl-NL" sz="2000" dirty="0"/>
+              <a:t> </a:t>
+            </a:r>
+            <a:r>
+              <a:rPr lang="nl-NL" sz="2000" dirty="0" err="1"/>
+              <a:t>contains</a:t>
+            </a:r>
+            <a:r>
+              <a:rPr lang="nl-NL" sz="2000" dirty="0"/>
+              <a:t> </a:t>
+            </a:r>
+            <a:r>
+              <a:rPr lang="nl-NL" sz="2000" dirty="0" err="1"/>
+              <a:t>my</a:t>
+            </a:r>
+            <a:r>
+              <a:rPr lang="nl-NL" sz="2000" dirty="0"/>
+              <a:t> </a:t>
+            </a:r>
+            <a:r>
+              <a:rPr lang="nl-NL" sz="2000" dirty="0" err="1"/>
+              <a:t>worked</a:t>
+            </a:r>
+            <a:r>
+              <a:rPr lang="nl-NL" sz="2000" dirty="0"/>
+              <a:t> </a:t>
+            </a:r>
+            <a:r>
+              <a:rPr lang="nl-NL" sz="2000" dirty="0" err="1"/>
+              <a:t>answer</a:t>
+            </a:r>
+            <a:r>
+              <a:rPr lang="nl-NL" sz="2000" dirty="0"/>
+              <a:t>.</a:t>
+            </a:r>
+          </a:p>
+          <a:p>
+            <a:endParaRPr lang="nl-NL" sz="2000" dirty="0"/>
+          </a:p>
+          <a:p>
+            <a:r>
+              <a:rPr lang="nl-NL" sz="2000" dirty="0" err="1"/>
+              <a:t>Use</a:t>
+            </a:r>
+            <a:r>
+              <a:rPr lang="nl-NL" sz="2000" dirty="0"/>
+              <a:t> </a:t>
+            </a:r>
+            <a:r>
+              <a:rPr lang="nl-NL" sz="2000" dirty="0" err="1"/>
+              <a:t>to</a:t>
+            </a:r>
+            <a:r>
+              <a:rPr lang="nl-NL" sz="2000" dirty="0"/>
+              <a:t> </a:t>
+            </a:r>
+            <a:r>
+              <a:rPr lang="nl-NL" sz="2000" dirty="0" err="1"/>
+              <a:t>compare</a:t>
+            </a:r>
+            <a:r>
+              <a:rPr lang="nl-NL" sz="2000" dirty="0"/>
+              <a:t> </a:t>
+            </a:r>
+            <a:r>
+              <a:rPr lang="nl-NL" sz="2000" dirty="0" err="1"/>
+              <a:t>with</a:t>
+            </a:r>
+            <a:r>
+              <a:rPr lang="nl-NL" sz="2000" dirty="0"/>
+              <a:t> </a:t>
+            </a:r>
+            <a:r>
+              <a:rPr lang="nl-NL" sz="2000" dirty="0" err="1"/>
+              <a:t>your</a:t>
+            </a:r>
+            <a:r>
+              <a:rPr lang="nl-NL" sz="2000" dirty="0"/>
+              <a:t> </a:t>
+            </a:r>
+            <a:r>
+              <a:rPr lang="nl-NL" sz="2000" dirty="0" err="1"/>
+              <a:t>own</a:t>
+            </a:r>
+            <a:r>
+              <a:rPr lang="nl-NL" sz="2000" dirty="0"/>
+              <a:t> </a:t>
+            </a:r>
+            <a:r>
+              <a:rPr lang="nl-NL" sz="2000" dirty="0" err="1"/>
+              <a:t>answer</a:t>
+            </a:r>
+            <a:r>
+              <a:rPr lang="nl-NL" sz="2000" dirty="0"/>
+              <a:t>, or as </a:t>
+            </a:r>
+            <a:r>
+              <a:rPr lang="nl-NL" sz="2000" dirty="0" err="1"/>
+              <a:t>aid</a:t>
+            </a:r>
+            <a:r>
+              <a:rPr lang="nl-NL" sz="2000" dirty="0"/>
+              <a:t> </a:t>
+            </a:r>
+            <a:r>
+              <a:rPr lang="nl-NL" sz="2000" dirty="0" err="1"/>
+              <a:t>if</a:t>
+            </a:r>
+            <a:r>
+              <a:rPr lang="nl-NL" sz="2000" dirty="0"/>
+              <a:t> </a:t>
+            </a:r>
+            <a:r>
+              <a:rPr lang="nl-NL" sz="2000" dirty="0" err="1"/>
+              <a:t>you</a:t>
+            </a:r>
+            <a:r>
+              <a:rPr lang="nl-NL" sz="2000" dirty="0"/>
+              <a:t> are </a:t>
+            </a:r>
+            <a:r>
+              <a:rPr lang="nl-NL" sz="2000" dirty="0" err="1"/>
+              <a:t>stuck</a:t>
+            </a:r>
+            <a:r>
+              <a:rPr lang="nl-NL" sz="2000" dirty="0"/>
+              <a:t>.</a:t>
+            </a:r>
+          </a:p>
+          <a:p>
+            <a:endParaRPr lang="nl-NL" sz="2000"/>
+          </a:p>
+          <a:p>
+            <a:r>
+              <a:rPr lang="nl-NL" sz="2000"/>
+              <a:t>You</a:t>
+            </a:r>
+            <a:r>
+              <a:rPr lang="nl-NL" sz="2000" dirty="0"/>
+              <a:t> </a:t>
+            </a:r>
+            <a:r>
+              <a:rPr lang="nl-NL" sz="2000" dirty="0" err="1"/>
+              <a:t>can</a:t>
+            </a:r>
+            <a:r>
+              <a:rPr lang="nl-NL" sz="2000" dirty="0"/>
+              <a:t> copy-paste </a:t>
+            </a:r>
+            <a:r>
+              <a:rPr lang="nl-NL" sz="2000" dirty="0" err="1"/>
+              <a:t>everything</a:t>
+            </a:r>
+            <a:r>
+              <a:rPr lang="nl-NL" sz="2000" dirty="0"/>
+              <a:t>, but </a:t>
+            </a:r>
+            <a:r>
+              <a:rPr lang="nl-NL" sz="2000" dirty="0" err="1"/>
+              <a:t>then</a:t>
+            </a:r>
+            <a:r>
+              <a:rPr lang="nl-NL" sz="2000" dirty="0"/>
+              <a:t> </a:t>
+            </a:r>
+            <a:r>
+              <a:rPr lang="nl-NL" sz="2000" dirty="0" err="1"/>
+              <a:t>why</a:t>
+            </a:r>
+            <a:r>
+              <a:rPr lang="nl-NL" sz="2000" dirty="0"/>
+              <a:t> are </a:t>
+            </a:r>
+            <a:r>
+              <a:rPr lang="nl-NL" sz="2000" dirty="0" err="1"/>
+              <a:t>you</a:t>
+            </a:r>
+            <a:r>
+              <a:rPr lang="nl-NL" sz="2000" dirty="0"/>
+              <a:t> here?</a:t>
+            </a:r>
+            <a:endParaRPr lang="nl-NL" sz="1600" dirty="0"/>
+          </a:p>
+        </p:txBody>
+      </p:sp>
+    </p:spTree>
+    <p:extLst>
+      <p:ext uri="{BB962C8B-B14F-4D97-AF65-F5344CB8AC3E}">
+        <p14:creationId xmlns:p14="http://schemas.microsoft.com/office/powerpoint/2010/main" val="1063814268"/>
+      </p:ext>
+    </p:extLst>
+  </p:cSld>
+  <p:clrMapOvr>
+    <a:masterClrMapping/>
+  </p:clrMapOvr>
+</p:sld>
+</file>
+
+<file path=ppt/slides/slide26.xml><?xml version="1.0" encoding="utf-8"?>
+<p:sld xmlns:a="http://schemas.openxmlformats.org/drawingml/2006/main" xmlns:r="http://schemas.openxmlformats.org/officeDocument/2006/relationships" xmlns:p="http://schemas.openxmlformats.org/presentationml/2006/main">
+  <p:cSld>
+    <p:spTree>
+      <p:nvGrpSpPr>
+        <p:cNvPr id="1" name="">
+          <a:extLst>
+            <a:ext uri="{FF2B5EF4-FFF2-40B4-BE49-F238E27FC236}">
+              <a16:creationId xmlns:a16="http://schemas.microsoft.com/office/drawing/2014/main" id="{43F4BC7F-E6EA-B1C5-187A-F9C3C9A560C1}"/>
+            </a:ext>
+          </a:extLst>
+        </p:cNvPr>
+        <p:cNvGrpSpPr/>
+        <p:nvPr/>
+      </p:nvGrpSpPr>
+      <p:grpSpPr>
+        <a:xfrm>
+          <a:off x="0" y="0"/>
+          <a:ext cx="0" cy="0"/>
+          <a:chOff x="0" y="0"/>
+          <a:chExt cx="0" cy="0"/>
+        </a:xfrm>
+      </p:grpSpPr>
+      <p:sp>
+        <p:nvSpPr>
+          <p:cNvPr id="2" name="Titel 1">
+            <a:extLst>
+              <a:ext uri="{FF2B5EF4-FFF2-40B4-BE49-F238E27FC236}">
+                <a16:creationId xmlns:a16="http://schemas.microsoft.com/office/drawing/2014/main" id="{546A824F-EA24-26C1-201B-02399D405EC3}"/>
+              </a:ext>
+            </a:extLst>
+          </p:cNvPr>
+          <p:cNvSpPr>
+            <a:spLocks noGrp="1"/>
+          </p:cNvSpPr>
+          <p:nvPr>
+            <p:ph type="title"/>
+          </p:nvPr>
+        </p:nvSpPr>
+        <p:spPr/>
+        <p:txBody>
+          <a:bodyPr/>
+          <a:lstStyle/>
+          <a:p>
+            <a:r>
+              <a:rPr lang="nl-NL" dirty="0" err="1"/>
+              <a:t>Miscellaneous</a:t>
+            </a:r>
+            <a:endParaRPr lang="nl-NL" dirty="0"/>
+          </a:p>
+        </p:txBody>
+      </p:sp>
+      <p:sp>
+        <p:nvSpPr>
+          <p:cNvPr id="3" name="Tijdelijke aanduiding voor tekst 2">
+            <a:extLst>
+              <a:ext uri="{FF2B5EF4-FFF2-40B4-BE49-F238E27FC236}">
+                <a16:creationId xmlns:a16="http://schemas.microsoft.com/office/drawing/2014/main" id="{6D2F2711-D7ED-5DBA-F529-1E09CF031BE4}"/>
+              </a:ext>
+            </a:extLst>
+          </p:cNvPr>
+          <p:cNvSpPr>
+            <a:spLocks noGrp="1"/>
+          </p:cNvSpPr>
+          <p:nvPr>
+            <p:ph type="body" idx="1"/>
+          </p:nvPr>
+        </p:nvSpPr>
+        <p:spPr/>
+        <p:txBody>
+          <a:bodyPr/>
+          <a:lstStyle/>
+          <a:p>
+            <a:r>
+              <a:rPr lang="nl-NL" dirty="0" err="1"/>
+              <a:t>Might</a:t>
+            </a:r>
+            <a:r>
+              <a:rPr lang="nl-NL" dirty="0"/>
+              <a:t> </a:t>
+            </a:r>
+            <a:r>
+              <a:rPr lang="nl-NL" dirty="0" err="1"/>
+              <a:t>be</a:t>
+            </a:r>
+            <a:r>
+              <a:rPr lang="nl-NL" dirty="0"/>
+              <a:t> </a:t>
+            </a:r>
+            <a:r>
+              <a:rPr lang="nl-NL" dirty="0" err="1"/>
+              <a:t>handy</a:t>
+            </a:r>
+            <a:endParaRPr lang="nl-NL" dirty="0"/>
+          </a:p>
+        </p:txBody>
+      </p:sp>
+    </p:spTree>
+    <p:extLst>
+      <p:ext uri="{BB962C8B-B14F-4D97-AF65-F5344CB8AC3E}">
+        <p14:creationId xmlns:p14="http://schemas.microsoft.com/office/powerpoint/2010/main" val="2040792380"/>
+      </p:ext>
+    </p:extLst>
+  </p:cSld>
+  <p:clrMapOvr>
+    <a:masterClrMapping/>
+  </p:clrMapOvr>
+</p:sld>
+</file>
+
+<file path=ppt/slides/slide27.xml><?xml version="1.0" encoding="utf-8"?>
 <p:sld xmlns:a="http://schemas.openxmlformats.org/drawingml/2006/main" xmlns:r="http://schemas.openxmlformats.org/officeDocument/2006/relationships" xmlns:p="http://schemas.openxmlformats.org/presentationml/2006/main">
   <p:cSld>
     <p:spTree>
@@ -11246,8 +13483,8 @@
           </a:p>
         </p:txBody>
       </p:sp>
-      <mc:AlternateContent xmlns:mc="http://schemas.openxmlformats.org/markup-compatibility/2006" xmlns:a14="http://schemas.microsoft.com/office/drawing/2010/main">
-        <mc:Choice Requires="a14">
+      <mc:AlternateContent xmlns:mc="http://schemas.openxmlformats.org/markup-compatibility/2006">
+        <mc:Choice xmlns:a14="http://schemas.microsoft.com/office/drawing/2010/main" Requires="a14">
           <p:sp>
             <p:nvSpPr>
               <p:cNvPr id="3" name="Content Placeholder 2">
@@ -11273,7 +13510,7 @@
               <a:p>
                 <a:r>
                   <a:rPr lang="en-US" sz="2000" dirty="0"/>
-                  <a:t>How to get the posterior model probabilities from the Bayes factor:</a:t>
+                  <a:t>How to get the posterior model probabilities from the Bayes factor, for two models:</a:t>
                 </a:r>
               </a:p>
               <a:p>
@@ -11552,13 +13789,810 @@
                 </a14:m>
                 <a:r>
                   <a:rPr lang="nl-NL" sz="2000" dirty="0"/>
-                  <a:t>)</a:t>
+                  <a:t>).</a:t>
+                </a:r>
+              </a:p>
+              <a:p>
+                <a:r>
+                  <a:rPr lang="nl-NL" sz="2000" dirty="0"/>
+                  <a:t>How </a:t>
+                </a:r>
+                <a:r>
+                  <a:rPr lang="nl-NL" sz="2000" dirty="0" err="1"/>
+                  <a:t>to</a:t>
+                </a:r>
+                <a:r>
+                  <a:rPr lang="nl-NL" sz="2000" dirty="0"/>
+                  <a:t> get </a:t>
+                </a:r>
+                <a:r>
+                  <a:rPr lang="nl-NL" sz="2000" dirty="0" err="1"/>
+                  <a:t>the</a:t>
+                </a:r>
+                <a:r>
+                  <a:rPr lang="nl-NL" sz="2000" dirty="0"/>
+                  <a:t> posterior model </a:t>
+                </a:r>
+                <a:r>
+                  <a:rPr lang="nl-NL" sz="2000" dirty="0" err="1"/>
+                  <a:t>probability</a:t>
+                </a:r>
+                <a:r>
+                  <a:rPr lang="nl-NL" sz="2000" dirty="0"/>
+                  <a:t> </a:t>
+                </a:r>
+                <a:r>
+                  <a:rPr lang="nl-NL" sz="2000" dirty="0" err="1"/>
+                  <a:t>from</a:t>
+                </a:r>
+                <a:r>
+                  <a:rPr lang="nl-NL" sz="2000" dirty="0"/>
+                  <a:t> log </a:t>
+                </a:r>
+                <a:r>
+                  <a:rPr lang="nl-NL" sz="2000" dirty="0" err="1"/>
+                  <a:t>marginal</a:t>
+                </a:r>
+                <a:r>
+                  <a:rPr lang="nl-NL" sz="2000" dirty="0"/>
+                  <a:t> </a:t>
+                </a:r>
+                <a:r>
+                  <a:rPr lang="nl-NL" sz="2000" dirty="0" err="1"/>
+                  <a:t>likelihoods</a:t>
+                </a:r>
+                <a:r>
+                  <a:rPr lang="nl-NL" sz="2000" dirty="0"/>
+                  <a:t>, </a:t>
+                </a:r>
+                <a:r>
+                  <a:rPr lang="nl-NL" sz="2000" dirty="0" err="1"/>
+                  <a:t>for</a:t>
+                </a:r>
+                <a:r>
+                  <a:rPr lang="nl-NL" sz="2000" dirty="0"/>
+                  <a:t> </a:t>
+                </a:r>
+                <a14:m>
+                  <m:oMath xmlns:m="http://schemas.openxmlformats.org/officeDocument/2006/math">
+                    <m:r>
+                      <a:rPr lang="nl-NL" sz="2000" b="0" i="1" smtClean="0">
+                        <a:latin typeface="Cambria Math" panose="02040503050406030204" pitchFamily="18" charset="0"/>
+                      </a:rPr>
+                      <m:t>𝑀</m:t>
+                    </m:r>
+                  </m:oMath>
+                </a14:m>
+                <a:r>
+                  <a:rPr lang="nl-NL" sz="2000" dirty="0"/>
+                  <a:t> models:</a:t>
+                </a:r>
+              </a:p>
+              <a:p>
+                <a:pPr marL="0" indent="0">
+                  <a:buNone/>
+                </a:pPr>
+                <a14:m>
+                  <m:oMathPara xmlns:m="http://schemas.openxmlformats.org/officeDocument/2006/math">
+                    <m:oMathParaPr>
+                      <m:jc m:val="centerGroup"/>
+                    </m:oMathParaPr>
+                    <m:oMath xmlns:m="http://schemas.openxmlformats.org/officeDocument/2006/math">
+                      <m:r>
+                        <a:rPr lang="nl-NL" sz="2000" b="0" i="1" smtClean="0">
+                          <a:latin typeface="Cambria Math" panose="02040503050406030204" pitchFamily="18" charset="0"/>
+                        </a:rPr>
+                        <m:t>𝑝</m:t>
+                      </m:r>
+                      <m:d>
+                        <m:dPr>
+                          <m:ctrlPr>
+                            <a:rPr lang="nl-NL" sz="2000" b="0" i="1" smtClean="0">
+                              <a:latin typeface="Cambria Math" panose="02040503050406030204" pitchFamily="18" charset="0"/>
+                            </a:rPr>
+                          </m:ctrlPr>
+                        </m:dPr>
+                        <m:e>
+                          <m:sSub>
+                            <m:sSubPr>
+                              <m:ctrlPr>
+                                <a:rPr lang="nl-NL" sz="2000" b="0" i="1" smtClean="0">
+                                  <a:latin typeface="Cambria Math" panose="02040503050406030204" pitchFamily="18" charset="0"/>
+                                </a:rPr>
+                              </m:ctrlPr>
+                            </m:sSubPr>
+                            <m:e>
+                              <m:r>
+                                <a:rPr lang="nl-NL" sz="2000" b="0" i="1" smtClean="0">
+                                  <a:latin typeface="Cambria Math" panose="02040503050406030204" pitchFamily="18" charset="0"/>
+                                </a:rPr>
+                                <m:t>ℳ</m:t>
+                              </m:r>
+                            </m:e>
+                            <m:sub>
+                              <m:r>
+                                <a:rPr lang="nl-NL" sz="2000" b="0" i="1" smtClean="0">
+                                  <a:latin typeface="Cambria Math" panose="02040503050406030204" pitchFamily="18" charset="0"/>
+                                </a:rPr>
+                                <m:t>𝑖</m:t>
+                              </m:r>
+                            </m:sub>
+                          </m:sSub>
+                        </m:e>
+                      </m:d>
+                      <m:r>
+                        <a:rPr lang="nl-NL" sz="2000" b="0" i="1" smtClean="0">
+                          <a:latin typeface="Cambria Math" panose="02040503050406030204" pitchFamily="18" charset="0"/>
+                        </a:rPr>
+                        <m:t>=</m:t>
+                      </m:r>
+                      <m:func>
+                        <m:funcPr>
+                          <m:ctrlPr>
+                            <a:rPr lang="nl-NL" sz="2000" b="0" i="1" smtClean="0">
+                              <a:latin typeface="Cambria Math" panose="02040503050406030204" pitchFamily="18" charset="0"/>
+                            </a:rPr>
+                          </m:ctrlPr>
+                        </m:funcPr>
+                        <m:fName>
+                          <m:r>
+                            <m:rPr>
+                              <m:sty m:val="p"/>
+                            </m:rPr>
+                            <a:rPr lang="nl-NL" sz="2000" b="0" i="0" smtClean="0">
+                              <a:latin typeface="Cambria Math" panose="02040503050406030204" pitchFamily="18" charset="0"/>
+                            </a:rPr>
+                            <m:t>exp</m:t>
+                          </m:r>
+                        </m:fName>
+                        <m:e>
+                          <m:d>
+                            <m:dPr>
+                              <m:ctrlPr>
+                                <a:rPr lang="nl-NL" sz="2000" b="0" i="1" smtClean="0">
+                                  <a:latin typeface="Cambria Math" panose="02040503050406030204" pitchFamily="18" charset="0"/>
+                                </a:rPr>
+                              </m:ctrlPr>
+                            </m:dPr>
+                            <m:e>
+                              <m:func>
+                                <m:funcPr>
+                                  <m:ctrlPr>
+                                    <a:rPr lang="nl-NL" sz="2000" b="0" i="1" smtClean="0">
+                                      <a:latin typeface="Cambria Math" panose="02040503050406030204" pitchFamily="18" charset="0"/>
+                                    </a:rPr>
+                                  </m:ctrlPr>
+                                </m:funcPr>
+                                <m:fName>
+                                  <m:r>
+                                    <m:rPr>
+                                      <m:sty m:val="p"/>
+                                    </m:rPr>
+                                    <a:rPr lang="nl-NL" sz="2000" b="0" i="0" smtClean="0">
+                                      <a:latin typeface="Cambria Math" panose="02040503050406030204" pitchFamily="18" charset="0"/>
+                                    </a:rPr>
+                                    <m:t>log</m:t>
+                                  </m:r>
+                                </m:fName>
+                                <m:e>
+                                  <m:r>
+                                    <a:rPr lang="nl-NL" sz="2000" b="0" i="1" smtClean="0">
+                                      <a:latin typeface="Cambria Math" panose="02040503050406030204" pitchFamily="18" charset="0"/>
+                                    </a:rPr>
+                                    <m:t>𝑝</m:t>
+                                  </m:r>
+                                  <m:d>
+                                    <m:dPr>
+                                      <m:sepChr m:val="∣"/>
+                                      <m:ctrlPr>
+                                        <a:rPr lang="nl-NL" sz="2000" b="0" i="1" smtClean="0">
+                                          <a:latin typeface="Cambria Math" panose="02040503050406030204" pitchFamily="18" charset="0"/>
+                                        </a:rPr>
+                                      </m:ctrlPr>
+                                    </m:dPr>
+                                    <m:e>
+                                      <m:r>
+                                        <a:rPr lang="nl-NL" sz="2000" b="0" i="1" smtClean="0">
+                                          <a:latin typeface="Cambria Math" panose="02040503050406030204" pitchFamily="18" charset="0"/>
+                                        </a:rPr>
+                                        <m:t>𝒟</m:t>
+                                      </m:r>
+                                    </m:e>
+                                    <m:e>
+                                      <m:sSub>
+                                        <m:sSubPr>
+                                          <m:ctrlPr>
+                                            <a:rPr lang="nl-NL" sz="2000" b="0" i="1" smtClean="0">
+                                              <a:latin typeface="Cambria Math" panose="02040503050406030204" pitchFamily="18" charset="0"/>
+                                            </a:rPr>
+                                          </m:ctrlPr>
+                                        </m:sSubPr>
+                                        <m:e>
+                                          <m:r>
+                                            <a:rPr lang="nl-NL" sz="2000" b="0" i="1" smtClean="0">
+                                              <a:latin typeface="Cambria Math" panose="02040503050406030204" pitchFamily="18" charset="0"/>
+                                            </a:rPr>
+                                            <m:t>ℳ</m:t>
+                                          </m:r>
+                                        </m:e>
+                                        <m:sub>
+                                          <m:r>
+                                            <a:rPr lang="nl-NL" sz="2000" b="0" i="1" smtClean="0">
+                                              <a:latin typeface="Cambria Math" panose="02040503050406030204" pitchFamily="18" charset="0"/>
+                                            </a:rPr>
+                                            <m:t>𝑖</m:t>
+                                          </m:r>
+                                        </m:sub>
+                                      </m:sSub>
+                                    </m:e>
+                                  </m:d>
+                                  <m:r>
+                                    <a:rPr lang="nl-NL" sz="2000" b="0" i="1" smtClean="0">
+                                      <a:latin typeface="Cambria Math" panose="02040503050406030204" pitchFamily="18" charset="0"/>
+                                    </a:rPr>
+                                    <m:t>−</m:t>
+                                  </m:r>
+                                  <m:func>
+                                    <m:funcPr>
+                                      <m:ctrlPr>
+                                        <a:rPr lang="nl-NL" sz="2000" b="0" i="1" smtClean="0">
+                                          <a:latin typeface="Cambria Math" panose="02040503050406030204" pitchFamily="18" charset="0"/>
+                                        </a:rPr>
+                                      </m:ctrlPr>
+                                    </m:funcPr>
+                                    <m:fName>
+                                      <m:r>
+                                        <m:rPr>
+                                          <m:sty m:val="p"/>
+                                        </m:rPr>
+                                        <a:rPr lang="nl-NL" sz="2000" b="0" i="0" smtClean="0">
+                                          <a:latin typeface="Cambria Math" panose="02040503050406030204" pitchFamily="18" charset="0"/>
+                                        </a:rPr>
+                                        <m:t>log</m:t>
+                                      </m:r>
+                                    </m:fName>
+                                    <m:e>
+                                      <m:nary>
+                                        <m:naryPr>
+                                          <m:chr m:val="∑"/>
+                                          <m:ctrlPr>
+                                            <a:rPr lang="nl-NL" sz="2000" b="0" i="1" smtClean="0">
+                                              <a:latin typeface="Cambria Math" panose="02040503050406030204" pitchFamily="18" charset="0"/>
+                                            </a:rPr>
+                                          </m:ctrlPr>
+                                        </m:naryPr>
+                                        <m:sub>
+                                          <m:r>
+                                            <m:rPr>
+                                              <m:brk m:alnAt="23"/>
+                                            </m:rPr>
+                                            <a:rPr lang="nl-NL" sz="2000" b="0" i="1" smtClean="0">
+                                              <a:latin typeface="Cambria Math" panose="02040503050406030204" pitchFamily="18" charset="0"/>
+                                            </a:rPr>
+                                            <m:t>𝑗</m:t>
+                                          </m:r>
+                                          <m:r>
+                                            <a:rPr lang="nl-NL" sz="2000" b="0" i="1" smtClean="0">
+                                              <a:latin typeface="Cambria Math" panose="02040503050406030204" pitchFamily="18" charset="0"/>
+                                            </a:rPr>
+                                            <m:t>=1</m:t>
+                                          </m:r>
+                                        </m:sub>
+                                        <m:sup>
+                                          <m:r>
+                                            <a:rPr lang="nl-NL" sz="2000" b="0" i="1" smtClean="0">
+                                              <a:latin typeface="Cambria Math" panose="02040503050406030204" pitchFamily="18" charset="0"/>
+                                            </a:rPr>
+                                            <m:t>𝑀</m:t>
+                                          </m:r>
+                                        </m:sup>
+                                        <m:e>
+                                          <m:func>
+                                            <m:funcPr>
+                                              <m:ctrlPr>
+                                                <a:rPr lang="nl-NL" sz="2000" b="0" i="1" smtClean="0">
+                                                  <a:latin typeface="Cambria Math" panose="02040503050406030204" pitchFamily="18" charset="0"/>
+                                                </a:rPr>
+                                              </m:ctrlPr>
+                                            </m:funcPr>
+                                            <m:fName>
+                                              <m:r>
+                                                <m:rPr>
+                                                  <m:sty m:val="p"/>
+                                                </m:rPr>
+                                                <a:rPr lang="nl-NL" sz="2000" b="0" i="0" smtClean="0">
+                                                  <a:latin typeface="Cambria Math" panose="02040503050406030204" pitchFamily="18" charset="0"/>
+                                                </a:rPr>
+                                                <m:t>exp</m:t>
+                                              </m:r>
+                                            </m:fName>
+                                            <m:e>
+                                              <m:func>
+                                                <m:funcPr>
+                                                  <m:ctrlPr>
+                                                    <a:rPr lang="nl-NL" sz="2000" b="0" i="1" smtClean="0">
+                                                      <a:latin typeface="Cambria Math" panose="02040503050406030204" pitchFamily="18" charset="0"/>
+                                                    </a:rPr>
+                                                  </m:ctrlPr>
+                                                </m:funcPr>
+                                                <m:fName>
+                                                  <m:r>
+                                                    <m:rPr>
+                                                      <m:sty m:val="p"/>
+                                                    </m:rPr>
+                                                    <a:rPr lang="nl-NL" sz="2000" b="0" i="0" smtClean="0">
+                                                      <a:latin typeface="Cambria Math" panose="02040503050406030204" pitchFamily="18" charset="0"/>
+                                                    </a:rPr>
+                                                    <m:t>log</m:t>
+                                                  </m:r>
+                                                </m:fName>
+                                                <m:e>
+                                                  <m:r>
+                                                    <a:rPr lang="nl-NL" sz="2000" b="0" i="1" smtClean="0">
+                                                      <a:latin typeface="Cambria Math" panose="02040503050406030204" pitchFamily="18" charset="0"/>
+                                                    </a:rPr>
+                                                    <m:t>𝑝</m:t>
+                                                  </m:r>
+                                                  <m:d>
+                                                    <m:dPr>
+                                                      <m:sepChr m:val="∣"/>
+                                                      <m:ctrlPr>
+                                                        <a:rPr lang="nl-NL" sz="2000" b="0" i="1" smtClean="0">
+                                                          <a:latin typeface="Cambria Math" panose="02040503050406030204" pitchFamily="18" charset="0"/>
+                                                        </a:rPr>
+                                                      </m:ctrlPr>
+                                                    </m:dPr>
+                                                    <m:e>
+                                                      <m:r>
+                                                        <a:rPr lang="nl-NL" sz="2000" b="0" i="1" smtClean="0">
+                                                          <a:latin typeface="Cambria Math" panose="02040503050406030204" pitchFamily="18" charset="0"/>
+                                                        </a:rPr>
+                                                        <m:t>𝒟</m:t>
+                                                      </m:r>
+                                                    </m:e>
+                                                    <m:e>
+                                                      <m:sSub>
+                                                        <m:sSubPr>
+                                                          <m:ctrlPr>
+                                                            <a:rPr lang="nl-NL" sz="2000" b="0" i="1" smtClean="0">
+                                                              <a:latin typeface="Cambria Math" panose="02040503050406030204" pitchFamily="18" charset="0"/>
+                                                            </a:rPr>
+                                                          </m:ctrlPr>
+                                                        </m:sSubPr>
+                                                        <m:e>
+                                                          <m:r>
+                                                            <a:rPr lang="nl-NL" sz="2000" b="0" i="1" smtClean="0">
+                                                              <a:latin typeface="Cambria Math" panose="02040503050406030204" pitchFamily="18" charset="0"/>
+                                                            </a:rPr>
+                                                            <m:t>ℳ</m:t>
+                                                          </m:r>
+                                                        </m:e>
+                                                        <m:sub>
+                                                          <m:r>
+                                                            <a:rPr lang="nl-NL" sz="2000" b="0" i="1" smtClean="0">
+                                                              <a:latin typeface="Cambria Math" panose="02040503050406030204" pitchFamily="18" charset="0"/>
+                                                            </a:rPr>
+                                                            <m:t>𝑗</m:t>
+                                                          </m:r>
+                                                        </m:sub>
+                                                      </m:sSub>
+                                                    </m:e>
+                                                  </m:d>
+                                                </m:e>
+                                              </m:func>
+                                            </m:e>
+                                          </m:func>
+                                        </m:e>
+                                      </m:nary>
+                                    </m:e>
+                                  </m:func>
+                                </m:e>
+                              </m:func>
+                            </m:e>
+                          </m:d>
+                        </m:e>
+                      </m:func>
+                    </m:oMath>
+                  </m:oMathPara>
+                </a14:m>
+                <a:endParaRPr lang="nl-NL" sz="2000" dirty="0"/>
+              </a:p>
+              <a:p>
+                <a:r>
+                  <a:rPr lang="nl-NL" sz="2000" dirty="0"/>
+                  <a:t>Log-</a:t>
+                </a:r>
+                <a:r>
+                  <a:rPr lang="nl-NL" sz="2000" dirty="0" err="1"/>
+                  <a:t>sum</a:t>
+                </a:r>
+                <a:r>
+                  <a:rPr lang="nl-NL" sz="2000" dirty="0"/>
+                  <a:t>-</a:t>
+                </a:r>
+                <a:r>
+                  <a:rPr lang="nl-NL" sz="2000" dirty="0" err="1"/>
+                  <a:t>exp</a:t>
+                </a:r>
+                <a:r>
+                  <a:rPr lang="nl-NL" sz="2000" dirty="0"/>
+                  <a:t> is </a:t>
+                </a:r>
+                <a:r>
+                  <a:rPr lang="nl-NL" sz="2000" dirty="0" err="1"/>
+                  <a:t>not</a:t>
+                </a:r>
+                <a:r>
+                  <a:rPr lang="nl-NL" sz="2000" dirty="0"/>
+                  <a:t> </a:t>
+                </a:r>
+                <a:r>
+                  <a:rPr lang="nl-NL" sz="2000" dirty="0" err="1"/>
+                  <a:t>numerically</a:t>
+                </a:r>
+                <a:r>
+                  <a:rPr lang="nl-NL" sz="2000" dirty="0"/>
+                  <a:t> </a:t>
+                </a:r>
+                <a:r>
+                  <a:rPr lang="nl-NL" sz="2000" dirty="0" err="1"/>
+                  <a:t>stable</a:t>
+                </a:r>
+                <a:r>
+                  <a:rPr lang="nl-NL" sz="2000" dirty="0"/>
+                  <a:t>, but </a:t>
+                </a:r>
+                <a:r>
+                  <a:rPr lang="nl-NL" sz="2000" dirty="0" err="1">
+                    <a:latin typeface="Courier New" panose="02070309020205020404" pitchFamily="49" charset="0"/>
+                    <a:cs typeface="Courier New" panose="02070309020205020404" pitchFamily="49" charset="0"/>
+                  </a:rPr>
+                  <a:t>logsumexp</a:t>
+                </a:r>
+                <a:r>
+                  <a:rPr lang="nl-NL" sz="2000" dirty="0"/>
+                  <a:t> </a:t>
+                </a:r>
+                <a:r>
+                  <a:rPr lang="nl-NL" sz="2000" dirty="0" err="1"/>
+                  <a:t>implementations</a:t>
+                </a:r>
+                <a:r>
+                  <a:rPr lang="nl-NL" sz="2000" dirty="0"/>
+                  <a:t> do:</a:t>
+                </a:r>
+              </a:p>
+              <a:p>
+                <a:pPr marL="0" indent="0" algn="ctr">
+                  <a:buNone/>
+                </a:pPr>
+                <a14:m>
+                  <m:oMath xmlns:m="http://schemas.openxmlformats.org/officeDocument/2006/math">
+                    <m:r>
+                      <a:rPr lang="nl-NL" sz="2000" b="0" i="1" smtClean="0">
+                        <a:latin typeface="Cambria Math" panose="02040503050406030204" pitchFamily="18" charset="0"/>
+                      </a:rPr>
+                      <m:t>𝑦</m:t>
+                    </m:r>
+                    <m:r>
+                      <a:rPr lang="nl-NL" sz="2000" b="0" i="1" smtClean="0">
+                        <a:latin typeface="Cambria Math" panose="02040503050406030204" pitchFamily="18" charset="0"/>
+                      </a:rPr>
+                      <m:t>=</m:t>
+                    </m:r>
+                    <m:r>
+                      <a:rPr lang="nl-NL" sz="2000" b="0" i="1" smtClean="0">
+                        <a:latin typeface="Cambria Math" panose="02040503050406030204" pitchFamily="18" charset="0"/>
+                      </a:rPr>
+                      <m:t>𝑐</m:t>
+                    </m:r>
+                    <m:r>
+                      <a:rPr lang="nl-NL" sz="2000" b="0" i="1" smtClean="0">
+                        <a:latin typeface="Cambria Math" panose="02040503050406030204" pitchFamily="18" charset="0"/>
+                      </a:rPr>
+                      <m:t>+</m:t>
+                    </m:r>
+                    <m:func>
+                      <m:funcPr>
+                        <m:ctrlPr>
+                          <a:rPr lang="nl-NL" sz="2000" b="0" i="1" smtClean="0">
+                            <a:latin typeface="Cambria Math" panose="02040503050406030204" pitchFamily="18" charset="0"/>
+                          </a:rPr>
+                        </m:ctrlPr>
+                      </m:funcPr>
+                      <m:fName>
+                        <m:r>
+                          <m:rPr>
+                            <m:sty m:val="p"/>
+                          </m:rPr>
+                          <a:rPr lang="nl-NL" sz="2000" b="0" i="0" smtClean="0">
+                            <a:latin typeface="Cambria Math" panose="02040503050406030204" pitchFamily="18" charset="0"/>
+                          </a:rPr>
+                          <m:t>log</m:t>
+                        </m:r>
+                      </m:fName>
+                      <m:e>
+                        <m:nary>
+                          <m:naryPr>
+                            <m:chr m:val="∑"/>
+                            <m:ctrlPr>
+                              <a:rPr lang="nl-NL" sz="2000" b="0" i="1" smtClean="0">
+                                <a:latin typeface="Cambria Math" panose="02040503050406030204" pitchFamily="18" charset="0"/>
+                              </a:rPr>
+                            </m:ctrlPr>
+                          </m:naryPr>
+                          <m:sub>
+                            <m:r>
+                              <m:rPr>
+                                <m:brk m:alnAt="23"/>
+                              </m:rPr>
+                              <a:rPr lang="nl-NL" sz="2000" b="0" i="1" smtClean="0">
+                                <a:latin typeface="Cambria Math" panose="02040503050406030204" pitchFamily="18" charset="0"/>
+                              </a:rPr>
+                              <m:t>𝑖</m:t>
+                            </m:r>
+                            <m:r>
+                              <a:rPr lang="nl-NL" sz="2000" b="0" i="1" smtClean="0">
+                                <a:latin typeface="Cambria Math" panose="02040503050406030204" pitchFamily="18" charset="0"/>
+                              </a:rPr>
+                              <m:t>=1</m:t>
+                            </m:r>
+                          </m:sub>
+                          <m:sup>
+                            <m:r>
+                              <a:rPr lang="nl-NL" sz="2000" b="0" i="1" smtClean="0">
+                                <a:latin typeface="Cambria Math" panose="02040503050406030204" pitchFamily="18" charset="0"/>
+                              </a:rPr>
+                              <m:t>𝑁</m:t>
+                            </m:r>
+                          </m:sup>
+                          <m:e>
+                            <m:func>
+                              <m:funcPr>
+                                <m:ctrlPr>
+                                  <a:rPr lang="nl-NL" sz="2000" b="0" i="1" smtClean="0">
+                                    <a:latin typeface="Cambria Math" panose="02040503050406030204" pitchFamily="18" charset="0"/>
+                                  </a:rPr>
+                                </m:ctrlPr>
+                              </m:funcPr>
+                              <m:fName>
+                                <m:r>
+                                  <m:rPr>
+                                    <m:sty m:val="p"/>
+                                  </m:rPr>
+                                  <a:rPr lang="nl-NL" sz="2000" b="0" i="0" smtClean="0">
+                                    <a:latin typeface="Cambria Math" panose="02040503050406030204" pitchFamily="18" charset="0"/>
+                                  </a:rPr>
+                                  <m:t>exp</m:t>
+                                </m:r>
+                              </m:fName>
+                              <m:e>
+                                <m:d>
+                                  <m:dPr>
+                                    <m:ctrlPr>
+                                      <a:rPr lang="nl-NL" sz="2000" b="0" i="1" smtClean="0">
+                                        <a:latin typeface="Cambria Math" panose="02040503050406030204" pitchFamily="18" charset="0"/>
+                                      </a:rPr>
+                                    </m:ctrlPr>
+                                  </m:dPr>
+                                  <m:e>
+                                    <m:sSub>
+                                      <m:sSubPr>
+                                        <m:ctrlPr>
+                                          <a:rPr lang="nl-NL" sz="2000" b="0" i="1" smtClean="0">
+                                            <a:latin typeface="Cambria Math" panose="02040503050406030204" pitchFamily="18" charset="0"/>
+                                          </a:rPr>
+                                        </m:ctrlPr>
+                                      </m:sSubPr>
+                                      <m:e>
+                                        <m:r>
+                                          <a:rPr lang="nl-NL" sz="2000" b="0" i="1" smtClean="0">
+                                            <a:latin typeface="Cambria Math" panose="02040503050406030204" pitchFamily="18" charset="0"/>
+                                          </a:rPr>
+                                          <m:t>𝑥</m:t>
+                                        </m:r>
+                                      </m:e>
+                                      <m:sub>
+                                        <m:r>
+                                          <a:rPr lang="nl-NL" sz="2000" b="0" i="1" smtClean="0">
+                                            <a:latin typeface="Cambria Math" panose="02040503050406030204" pitchFamily="18" charset="0"/>
+                                          </a:rPr>
+                                          <m:t>𝑖</m:t>
+                                        </m:r>
+                                      </m:sub>
+                                    </m:sSub>
+                                    <m:r>
+                                      <a:rPr lang="nl-NL" sz="2000" b="0" i="1" smtClean="0">
+                                        <a:latin typeface="Cambria Math" panose="02040503050406030204" pitchFamily="18" charset="0"/>
+                                      </a:rPr>
+                                      <m:t>−</m:t>
+                                    </m:r>
+                                    <m:r>
+                                      <a:rPr lang="nl-NL" sz="2000" b="0" i="1" smtClean="0">
+                                        <a:latin typeface="Cambria Math" panose="02040503050406030204" pitchFamily="18" charset="0"/>
+                                      </a:rPr>
+                                      <m:t>𝑐</m:t>
+                                    </m:r>
+                                  </m:e>
+                                </m:d>
+                              </m:e>
+                            </m:func>
+                          </m:e>
+                        </m:nary>
+                      </m:e>
+                    </m:func>
+                  </m:oMath>
+                </a14:m>
+                <a:r>
+                  <a:rPr lang="nl-NL" sz="2000" dirty="0"/>
+                  <a:t> </a:t>
+                </a:r>
+                <a:r>
+                  <a:rPr lang="nl-NL" sz="2000" dirty="0" err="1"/>
+                  <a:t>instead</a:t>
+                </a:r>
+                <a:r>
+                  <a:rPr lang="nl-NL" sz="2000" dirty="0"/>
+                  <a:t> of </a:t>
+                </a:r>
+                <a14:m>
+                  <m:oMath xmlns:m="http://schemas.openxmlformats.org/officeDocument/2006/math">
+                    <m:r>
+                      <a:rPr lang="nl-NL" sz="2000" b="0" i="1" smtClean="0">
+                        <a:latin typeface="Cambria Math" panose="02040503050406030204" pitchFamily="18" charset="0"/>
+                      </a:rPr>
+                      <m:t>𝑦</m:t>
+                    </m:r>
+                    <m:r>
+                      <a:rPr lang="nl-NL" sz="2000" b="0" i="1" smtClean="0">
+                        <a:latin typeface="Cambria Math" panose="02040503050406030204" pitchFamily="18" charset="0"/>
+                      </a:rPr>
+                      <m:t>=</m:t>
+                    </m:r>
+                    <m:func>
+                      <m:funcPr>
+                        <m:ctrlPr>
+                          <a:rPr lang="nl-NL" sz="2000" b="0" i="1" smtClean="0">
+                            <a:latin typeface="Cambria Math" panose="02040503050406030204" pitchFamily="18" charset="0"/>
+                          </a:rPr>
+                        </m:ctrlPr>
+                      </m:funcPr>
+                      <m:fName>
+                        <m:r>
+                          <m:rPr>
+                            <m:sty m:val="p"/>
+                          </m:rPr>
+                          <a:rPr lang="nl-NL" sz="2000" b="0" i="0" smtClean="0">
+                            <a:latin typeface="Cambria Math" panose="02040503050406030204" pitchFamily="18" charset="0"/>
+                          </a:rPr>
+                          <m:t>log</m:t>
+                        </m:r>
+                      </m:fName>
+                      <m:e>
+                        <m:nary>
+                          <m:naryPr>
+                            <m:chr m:val="∑"/>
+                            <m:ctrlPr>
+                              <a:rPr lang="nl-NL" sz="2000" b="0" i="1" smtClean="0">
+                                <a:latin typeface="Cambria Math" panose="02040503050406030204" pitchFamily="18" charset="0"/>
+                              </a:rPr>
+                            </m:ctrlPr>
+                          </m:naryPr>
+                          <m:sub>
+                            <m:r>
+                              <m:rPr>
+                                <m:brk m:alnAt="23"/>
+                              </m:rPr>
+                              <a:rPr lang="nl-NL" sz="2000" b="0" i="1" smtClean="0">
+                                <a:latin typeface="Cambria Math" panose="02040503050406030204" pitchFamily="18" charset="0"/>
+                              </a:rPr>
+                              <m:t>𝑖</m:t>
+                            </m:r>
+                            <m:r>
+                              <a:rPr lang="nl-NL" sz="2000" b="0" i="1" smtClean="0">
+                                <a:latin typeface="Cambria Math" panose="02040503050406030204" pitchFamily="18" charset="0"/>
+                              </a:rPr>
+                              <m:t>=1</m:t>
+                            </m:r>
+                          </m:sub>
+                          <m:sup>
+                            <m:r>
+                              <a:rPr lang="nl-NL" sz="2000" b="0" i="1" smtClean="0">
+                                <a:latin typeface="Cambria Math" panose="02040503050406030204" pitchFamily="18" charset="0"/>
+                              </a:rPr>
+                              <m:t>𝑁</m:t>
+                            </m:r>
+                          </m:sup>
+                          <m:e>
+                            <m:func>
+                              <m:funcPr>
+                                <m:ctrlPr>
+                                  <a:rPr lang="nl-NL" sz="2000" b="0" i="1" smtClean="0">
+                                    <a:latin typeface="Cambria Math" panose="02040503050406030204" pitchFamily="18" charset="0"/>
+                                  </a:rPr>
+                                </m:ctrlPr>
+                              </m:funcPr>
+                              <m:fName>
+                                <m:r>
+                                  <m:rPr>
+                                    <m:sty m:val="p"/>
+                                  </m:rPr>
+                                  <a:rPr lang="nl-NL" sz="2000" b="0" i="0" smtClean="0">
+                                    <a:latin typeface="Cambria Math" panose="02040503050406030204" pitchFamily="18" charset="0"/>
+                                  </a:rPr>
+                                  <m:t>exp</m:t>
+                                </m:r>
+                              </m:fName>
+                              <m:e>
+                                <m:d>
+                                  <m:dPr>
+                                    <m:ctrlPr>
+                                      <a:rPr lang="nl-NL" sz="2000" b="0" i="1" smtClean="0">
+                                        <a:latin typeface="Cambria Math" panose="02040503050406030204" pitchFamily="18" charset="0"/>
+                                      </a:rPr>
+                                    </m:ctrlPr>
+                                  </m:dPr>
+                                  <m:e>
+                                    <m:sSub>
+                                      <m:sSubPr>
+                                        <m:ctrlPr>
+                                          <a:rPr lang="nl-NL" sz="2000" b="0" i="1" smtClean="0">
+                                            <a:latin typeface="Cambria Math" panose="02040503050406030204" pitchFamily="18" charset="0"/>
+                                          </a:rPr>
+                                        </m:ctrlPr>
+                                      </m:sSubPr>
+                                      <m:e>
+                                        <m:r>
+                                          <a:rPr lang="nl-NL" sz="2000" b="0" i="1" smtClean="0">
+                                            <a:latin typeface="Cambria Math" panose="02040503050406030204" pitchFamily="18" charset="0"/>
+                                          </a:rPr>
+                                          <m:t>𝑥</m:t>
+                                        </m:r>
+                                      </m:e>
+                                      <m:sub>
+                                        <m:r>
+                                          <a:rPr lang="nl-NL" sz="2000" b="0" i="1" smtClean="0">
+                                            <a:latin typeface="Cambria Math" panose="02040503050406030204" pitchFamily="18" charset="0"/>
+                                          </a:rPr>
+                                          <m:t>𝑖</m:t>
+                                        </m:r>
+                                      </m:sub>
+                                    </m:sSub>
+                                  </m:e>
+                                </m:d>
+                              </m:e>
+                            </m:func>
+                          </m:e>
+                        </m:nary>
+                      </m:e>
+                    </m:func>
+                  </m:oMath>
+                </a14:m>
+                <a:r>
+                  <a:rPr lang="nl-NL" sz="2000" dirty="0"/>
+                  <a:t> </a:t>
+                </a:r>
+                <a:r>
+                  <a:rPr lang="nl-NL" sz="2000" dirty="0" err="1"/>
+                  <a:t>to</a:t>
+                </a:r>
+                <a:r>
+                  <a:rPr lang="nl-NL" sz="2000" dirty="0"/>
+                  <a:t> </a:t>
+                </a:r>
+                <a:r>
+                  <a:rPr lang="nl-NL" sz="2000" dirty="0" err="1"/>
+                  <a:t>avoid</a:t>
+                </a:r>
+                <a:r>
+                  <a:rPr lang="nl-NL" sz="2000" dirty="0"/>
+                  <a:t> issues.</a:t>
                 </a:r>
               </a:p>
             </p:txBody>
           </p:sp>
         </mc:Choice>
-        <mc:Fallback xmlns="">
+        <mc:Fallback>
           <p:sp>
             <p:nvSpPr>
               <p:cNvPr id="3" name="Content Placeholder 2">
@@ -14223,8 +17257,8 @@
           </a:p>
         </p:txBody>
       </p:sp>
-      <mc:AlternateContent xmlns:mc="http://schemas.openxmlformats.org/markup-compatibility/2006">
-        <mc:Choice xmlns:a14="http://schemas.microsoft.com/office/drawing/2010/main" Requires="a14">
+      <mc:AlternateContent xmlns:mc="http://schemas.openxmlformats.org/markup-compatibility/2006" xmlns:a14="http://schemas.microsoft.com/office/drawing/2010/main">
+        <mc:Choice Requires="a14">
           <p:sp>
             <p:nvSpPr>
               <p:cNvPr id="3" name="Content Placeholder 2">
@@ -14806,7 +17840,7 @@
             </p:txBody>
           </p:sp>
         </mc:Choice>
-        <mc:Fallback>
+        <mc:Fallback xmlns="">
           <p:sp>
             <p:nvSpPr>
               <p:cNvPr id="3" name="Content Placeholder 2">

--- a/BMA workshop intro lecture.pptx
+++ b/BMA workshop intro lecture.pptx
@@ -13259,11 +13259,11 @@
             </a:r>
           </a:p>
           <a:p>
-            <a:endParaRPr lang="nl-NL" sz="2000"/>
-          </a:p>
-          <a:p>
-            <a:r>
-              <a:rPr lang="nl-NL" sz="2000"/>
+            <a:endParaRPr lang="nl-NL" sz="2000" dirty="0"/>
+          </a:p>
+          <a:p>
+            <a:r>
+              <a:rPr lang="nl-NL" sz="2000" dirty="0" err="1"/>
               <a:t>You</a:t>
             </a:r>
             <a:r>
